--- a/Ecommerce_Report.pptx
+++ b/Ecommerce_Report.pptx
@@ -13,28 +13,29 @@
     <p:sldId id="272" r:id="rId7"/>
     <p:sldId id="273" r:id="rId8"/>
     <p:sldId id="274" r:id="rId9"/>
-    <p:sldId id="269" r:id="rId10"/>
+    <p:sldId id="275" r:id="rId10"/>
+    <p:sldId id="269" r:id="rId11"/>
   </p:sldIdLst>
   <p:sldSz cx="18288000" cy="10287000"/>
   <p:notesSz cx="6858000" cy="9144000"/>
   <p:embeddedFontLst>
     <p:embeddedFont>
-      <p:font typeface="Poppins Semi-Bold" panose="020B0604020202020204" charset="0"/>
-      <p:regular r:id="rId11"/>
+      <p:font typeface="Segoe UI Light" panose="020B0502040204020203" pitchFamily="34" charset="0"/>
+      <p:regular r:id="rId12"/>
+      <p:italic r:id="rId13"/>
     </p:embeddedFont>
     <p:embeddedFont>
       <p:font typeface="Poppins Bold" panose="020B0604020202020204" charset="0"/>
-      <p:regular r:id="rId12"/>
-    </p:embeddedFont>
-    <p:embeddedFont>
-      <p:font typeface="Segoe UI Light" panose="020B0502040204020203" pitchFamily="34" charset="0"/>
-      <p:regular r:id="rId13"/>
-      <p:italic r:id="rId14"/>
+      <p:regular r:id="rId14"/>
     </p:embeddedFont>
     <p:embeddedFont>
       <p:font typeface="Segoe UI Black" panose="020B0A02040204020203" pitchFamily="34" charset="0"/>
       <p:bold r:id="rId15"/>
       <p:boldItalic r:id="rId16"/>
+    </p:embeddedFont>
+    <p:embeddedFont>
+      <p:font typeface="Poppins Semi-Bold" panose="020B0604020202020204" charset="0"/>
+      <p:regular r:id="rId17"/>
     </p:embeddedFont>
   </p:embeddedFontLst>
   <p:defaultTextStyle>
@@ -3146,7 +3147,7 @@
               <a:alphaModFix amt="6000"/>
               <a:extLst>
                 <a:ext uri="{96DAC541-7B7A-43D3-8B79-37D633B846F1}">
-                  <asvg:svgBlip xmlns:asvg="http://schemas.microsoft.com/office/drawing/2016/SVG/main" xmlns="" r:embed="rId3"/>
+                  <asvg:svgBlip xmlns="" xmlns:asvg="http://schemas.microsoft.com/office/drawing/2016/SVG/main" r:embed="rId3"/>
                 </a:ext>
               </a:extLst>
             </a:blip>
@@ -3710,7 +3711,7 @@
             <a:blip r:embed="rId6">
               <a:extLst>
                 <a:ext uri="{96DAC541-7B7A-43D3-8B79-37D633B846F1}">
-                  <asvg:svgBlip xmlns:asvg="http://schemas.microsoft.com/office/drawing/2016/SVG/main" xmlns="" r:embed="rId9"/>
+                  <asvg:svgBlip xmlns="" xmlns:asvg="http://schemas.microsoft.com/office/drawing/2016/SVG/main" r:embed="rId9"/>
                 </a:ext>
               </a:extLst>
             </a:blip>
@@ -3763,7 +3764,7 @@
               <a:alphaModFix amt="44999"/>
               <a:extLst>
                 <a:ext uri="{96DAC541-7B7A-43D3-8B79-37D633B846F1}">
-                  <asvg:svgBlip xmlns:asvg="http://schemas.microsoft.com/office/drawing/2016/SVG/main" xmlns="" r:embed="rId11"/>
+                  <asvg:svgBlip xmlns="" xmlns:asvg="http://schemas.microsoft.com/office/drawing/2016/SVG/main" r:embed="rId11"/>
                 </a:ext>
               </a:extLst>
             </a:blip>
@@ -4024,7 +4025,7 @@
             <a:blip r:embed="rId14">
               <a:extLst>
                 <a:ext uri="{96DAC541-7B7A-43D3-8B79-37D633B846F1}">
-                  <asvg:svgBlip xmlns:asvg="http://schemas.microsoft.com/office/drawing/2016/SVG/main" xmlns="" r:embed="rId17"/>
+                  <asvg:svgBlip xmlns="" xmlns:asvg="http://schemas.microsoft.com/office/drawing/2016/SVG/main" r:embed="rId17"/>
                 </a:ext>
               </a:extLst>
             </a:blip>
@@ -4370,7 +4371,7 @@
 </p:sld>
 </file>
 
-<file path=ppt/slides/slide2.xml><?xml version="1.0" encoding="utf-8"?>
+<file path=ppt/slides/slide10.xml><?xml version="1.0" encoding="utf-8"?>
 <p:sld xmlns:a="http://schemas.openxmlformats.org/drawingml/2006/main" xmlns:r="http://schemas.openxmlformats.org/officeDocument/2006/relationships" xmlns:p="http://schemas.openxmlformats.org/presentationml/2006/main">
   <p:cSld>
     <p:spTree>
@@ -4395,7 +4396,7 @@
         </p:nvSpPr>
         <p:spPr>
           <a:xfrm flipH="1">
-            <a:off x="-7261192" y="6051085"/>
+            <a:off x="-2341491" y="6051085"/>
             <a:ext cx="24520492" cy="4402586"/>
           </a:xfrm>
           <a:custGeom>
@@ -4430,7 +4431,1102 @@
               <a:alphaModFix amt="6000"/>
               <a:extLst>
                 <a:ext uri="{96DAC541-7B7A-43D3-8B79-37D633B846F1}">
-                  <asvg:svgBlip xmlns:asvg="http://schemas.microsoft.com/office/drawing/2016/SVG/main" xmlns="" r:embed="rId3"/>
+                  <asvg:svgBlip xmlns="" xmlns:asvg="http://schemas.microsoft.com/office/drawing/2016/SVG/main" r:embed="rId3"/>
+                </a:ext>
+              </a:extLst>
+            </a:blip>
+            <a:stretch>
+              <a:fillRect/>
+            </a:stretch>
+          </a:blipFill>
+        </p:spPr>
+      </p:sp>
+      <p:grpSp>
+        <p:nvGrpSpPr>
+          <p:cNvPr id="3" name="Group 3"/>
+          <p:cNvGrpSpPr/>
+          <p:nvPr/>
+        </p:nvGrpSpPr>
+        <p:grpSpPr>
+          <a:xfrm rot="-1168322">
+            <a:off x="-591160" y="-1840415"/>
+            <a:ext cx="7434779" cy="15382828"/>
+            <a:chOff x="0" y="0"/>
+            <a:chExt cx="1958131" cy="4051444"/>
+          </a:xfrm>
+        </p:grpSpPr>
+        <p:sp>
+          <p:nvSpPr>
+            <p:cNvPr id="4" name="Freeform 4"/>
+            <p:cNvSpPr/>
+            <p:nvPr/>
+          </p:nvSpPr>
+          <p:spPr>
+            <a:xfrm>
+              <a:off x="0" y="0"/>
+              <a:ext cx="1958131" cy="4051444"/>
+            </a:xfrm>
+            <a:custGeom>
+              <a:avLst/>
+              <a:gdLst/>
+              <a:ahLst/>
+              <a:cxnLst/>
+              <a:rect l="l" t="t" r="r" b="b"/>
+              <a:pathLst>
+                <a:path w="1958131" h="4051444">
+                  <a:moveTo>
+                    <a:pt x="0" y="0"/>
+                  </a:moveTo>
+                  <a:lnTo>
+                    <a:pt x="1958131" y="0"/>
+                  </a:lnTo>
+                  <a:lnTo>
+                    <a:pt x="1958131" y="4051444"/>
+                  </a:lnTo>
+                  <a:lnTo>
+                    <a:pt x="0" y="4051444"/>
+                  </a:lnTo>
+                  <a:close/>
+                </a:path>
+              </a:pathLst>
+            </a:custGeom>
+            <a:solidFill>
+              <a:srgbClr val="20989B"/>
+            </a:solidFill>
+          </p:spPr>
+        </p:sp>
+        <p:sp>
+          <p:nvSpPr>
+            <p:cNvPr id="5" name="TextBox 5"/>
+            <p:cNvSpPr txBox="1"/>
+            <p:nvPr/>
+          </p:nvSpPr>
+          <p:spPr>
+            <a:xfrm>
+              <a:off x="0" y="-57150"/>
+              <a:ext cx="1958131" cy="4108594"/>
+            </a:xfrm>
+            <a:prstGeom prst="rect">
+              <a:avLst/>
+            </a:prstGeom>
+          </p:spPr>
+          <p:txBody>
+            <a:bodyPr lIns="50800" tIns="50800" rIns="50800" bIns="50800" rtlCol="0" anchor="ctr"/>
+            <a:lstStyle/>
+            <a:p>
+              <a:pPr algn="ctr">
+                <a:lnSpc>
+                  <a:spcPts val="2659"/>
+                </a:lnSpc>
+                <a:spcBef>
+                  <a:spcPct val="0"/>
+                </a:spcBef>
+              </a:pPr>
+              <a:endParaRPr/>
+            </a:p>
+          </p:txBody>
+        </p:sp>
+      </p:grpSp>
+      <p:sp>
+        <p:nvSpPr>
+          <p:cNvPr id="6" name="Freeform 6"/>
+          <p:cNvSpPr/>
+          <p:nvPr/>
+        </p:nvSpPr>
+        <p:spPr>
+          <a:xfrm rot="-6579275">
+            <a:off x="-3647729" y="4649456"/>
+            <a:ext cx="13353097" cy="404258"/>
+          </a:xfrm>
+          <a:custGeom>
+            <a:avLst/>
+            <a:gdLst/>
+            <a:ahLst/>
+            <a:cxnLst/>
+            <a:rect l="l" t="t" r="r" b="b"/>
+            <a:pathLst>
+              <a:path w="13353097" h="404258">
+                <a:moveTo>
+                  <a:pt x="0" y="0"/>
+                </a:moveTo>
+                <a:lnTo>
+                  <a:pt x="13353096" y="0"/>
+                </a:lnTo>
+                <a:lnTo>
+                  <a:pt x="13353096" y="404258"/>
+                </a:lnTo>
+                <a:lnTo>
+                  <a:pt x="0" y="404258"/>
+                </a:lnTo>
+                <a:lnTo>
+                  <a:pt x="0" y="0"/>
+                </a:lnTo>
+                <a:close/>
+              </a:path>
+            </a:pathLst>
+          </a:custGeom>
+          <a:blipFill>
+            <a:blip r:embed="rId4"/>
+            <a:stretch>
+              <a:fillRect t="-1843398"/>
+            </a:stretch>
+          </a:blipFill>
+        </p:spPr>
+      </p:sp>
+      <p:grpSp>
+        <p:nvGrpSpPr>
+          <p:cNvPr id="7" name="Group 7"/>
+          <p:cNvGrpSpPr/>
+          <p:nvPr/>
+        </p:nvGrpSpPr>
+        <p:grpSpPr>
+          <a:xfrm rot="-1168322">
+            <a:off x="-4404526" y="-1840415"/>
+            <a:ext cx="7434779" cy="15382828"/>
+            <a:chOff x="0" y="0"/>
+            <a:chExt cx="1958131" cy="4051444"/>
+          </a:xfrm>
+        </p:grpSpPr>
+        <p:sp>
+          <p:nvSpPr>
+            <p:cNvPr id="8" name="Freeform 8"/>
+            <p:cNvSpPr/>
+            <p:nvPr/>
+          </p:nvSpPr>
+          <p:spPr>
+            <a:xfrm>
+              <a:off x="0" y="0"/>
+              <a:ext cx="1958131" cy="4051444"/>
+            </a:xfrm>
+            <a:custGeom>
+              <a:avLst/>
+              <a:gdLst/>
+              <a:ahLst/>
+              <a:cxnLst/>
+              <a:rect l="l" t="t" r="r" b="b"/>
+              <a:pathLst>
+                <a:path w="1958131" h="4051444">
+                  <a:moveTo>
+                    <a:pt x="0" y="0"/>
+                  </a:moveTo>
+                  <a:lnTo>
+                    <a:pt x="1958131" y="0"/>
+                  </a:lnTo>
+                  <a:lnTo>
+                    <a:pt x="1958131" y="4051444"/>
+                  </a:lnTo>
+                  <a:lnTo>
+                    <a:pt x="0" y="4051444"/>
+                  </a:lnTo>
+                  <a:close/>
+                </a:path>
+              </a:pathLst>
+            </a:custGeom>
+            <a:solidFill>
+              <a:srgbClr val="39515A"/>
+            </a:solidFill>
+          </p:spPr>
+        </p:sp>
+        <p:sp>
+          <p:nvSpPr>
+            <p:cNvPr id="9" name="TextBox 9"/>
+            <p:cNvSpPr txBox="1"/>
+            <p:nvPr/>
+          </p:nvSpPr>
+          <p:spPr>
+            <a:xfrm>
+              <a:off x="0" y="-57150"/>
+              <a:ext cx="1958131" cy="4108594"/>
+            </a:xfrm>
+            <a:prstGeom prst="rect">
+              <a:avLst/>
+            </a:prstGeom>
+          </p:spPr>
+          <p:txBody>
+            <a:bodyPr lIns="50800" tIns="50800" rIns="50800" bIns="50800" rtlCol="0" anchor="ctr"/>
+            <a:lstStyle/>
+            <a:p>
+              <a:pPr algn="ctr">
+                <a:lnSpc>
+                  <a:spcPts val="2659"/>
+                </a:lnSpc>
+                <a:spcBef>
+                  <a:spcPct val="0"/>
+                </a:spcBef>
+              </a:pPr>
+              <a:endParaRPr/>
+            </a:p>
+          </p:txBody>
+        </p:sp>
+      </p:grpSp>
+      <p:grpSp>
+        <p:nvGrpSpPr>
+          <p:cNvPr id="10" name="Group 10"/>
+          <p:cNvGrpSpPr/>
+          <p:nvPr/>
+        </p:nvGrpSpPr>
+        <p:grpSpPr>
+          <a:xfrm>
+            <a:off x="592816" y="1461689"/>
+            <a:ext cx="6973020" cy="7363621"/>
+            <a:chOff x="0" y="0"/>
+            <a:chExt cx="5960491" cy="6294374"/>
+          </a:xfrm>
+        </p:grpSpPr>
+        <p:sp>
+          <p:nvSpPr>
+            <p:cNvPr id="11" name="Freeform 11"/>
+            <p:cNvSpPr/>
+            <p:nvPr/>
+          </p:nvSpPr>
+          <p:spPr>
+            <a:xfrm>
+              <a:off x="0" y="-44"/>
+              <a:ext cx="5960480" cy="6294418"/>
+            </a:xfrm>
+            <a:custGeom>
+              <a:avLst/>
+              <a:gdLst/>
+              <a:ahLst/>
+              <a:cxnLst/>
+              <a:rect l="l" t="t" r="r" b="b"/>
+              <a:pathLst>
+                <a:path w="5960480" h="6294418">
+                  <a:moveTo>
+                    <a:pt x="4226814" y="1119549"/>
+                  </a:moveTo>
+                  <a:cubicBezTo>
+                    <a:pt x="4173601" y="967911"/>
+                    <a:pt x="4001770" y="815892"/>
+                    <a:pt x="3844798" y="781729"/>
+                  </a:cubicBezTo>
+                  <a:lnTo>
+                    <a:pt x="285369" y="6521"/>
+                  </a:lnTo>
+                  <a:cubicBezTo>
+                    <a:pt x="128397" y="-27642"/>
+                    <a:pt x="0" y="75863"/>
+                    <a:pt x="0" y="236518"/>
+                  </a:cubicBezTo>
+                  <a:lnTo>
+                    <a:pt x="0" y="6002318"/>
+                  </a:lnTo>
+                  <a:cubicBezTo>
+                    <a:pt x="0" y="6162973"/>
+                    <a:pt x="131445" y="6294418"/>
+                    <a:pt x="292100" y="6294418"/>
+                  </a:cubicBezTo>
+                  <a:lnTo>
+                    <a:pt x="5749544" y="6294418"/>
+                  </a:lnTo>
+                  <a:cubicBezTo>
+                    <a:pt x="5910199" y="6294418"/>
+                    <a:pt x="5998083" y="6170339"/>
+                    <a:pt x="5944997" y="6018828"/>
+                  </a:cubicBezTo>
+                  <a:lnTo>
+                    <a:pt x="4226814" y="1119549"/>
+                  </a:lnTo>
+                  <a:close/>
+                </a:path>
+              </a:pathLst>
+            </a:custGeom>
+            <a:blipFill>
+              <a:blip r:embed="rId5"/>
+              <a:stretch>
+                <a:fillRect l="-19013" t="-38177" r="-326" b="-31122"/>
+              </a:stretch>
+            </a:blipFill>
+            <a:ln w="114300" cap="sq">
+              <a:solidFill>
+                <a:srgbClr val="FFFFFF"/>
+              </a:solidFill>
+              <a:prstDash val="solid"/>
+              <a:miter/>
+            </a:ln>
+          </p:spPr>
+        </p:sp>
+      </p:grpSp>
+      <p:grpSp>
+        <p:nvGrpSpPr>
+          <p:cNvPr id="13" name="Group 13"/>
+          <p:cNvGrpSpPr/>
+          <p:nvPr/>
+        </p:nvGrpSpPr>
+        <p:grpSpPr>
+          <a:xfrm rot="-1168322">
+            <a:off x="4937715" y="-2713330"/>
+            <a:ext cx="887655" cy="8696949"/>
+            <a:chOff x="0" y="0"/>
+            <a:chExt cx="233786" cy="2290554"/>
+          </a:xfrm>
+        </p:grpSpPr>
+        <p:sp>
+          <p:nvSpPr>
+            <p:cNvPr id="14" name="Freeform 14"/>
+            <p:cNvSpPr/>
+            <p:nvPr/>
+          </p:nvSpPr>
+          <p:spPr>
+            <a:xfrm>
+              <a:off x="0" y="0"/>
+              <a:ext cx="233786" cy="2290554"/>
+            </a:xfrm>
+            <a:custGeom>
+              <a:avLst/>
+              <a:gdLst/>
+              <a:ahLst/>
+              <a:cxnLst/>
+              <a:rect l="l" t="t" r="r" b="b"/>
+              <a:pathLst>
+                <a:path w="233786" h="2290554">
+                  <a:moveTo>
+                    <a:pt x="0" y="0"/>
+                  </a:moveTo>
+                  <a:lnTo>
+                    <a:pt x="233786" y="0"/>
+                  </a:lnTo>
+                  <a:lnTo>
+                    <a:pt x="233786" y="2290554"/>
+                  </a:lnTo>
+                  <a:lnTo>
+                    <a:pt x="0" y="2290554"/>
+                  </a:lnTo>
+                  <a:close/>
+                </a:path>
+              </a:pathLst>
+            </a:custGeom>
+            <a:gradFill rotWithShape="1">
+              <a:gsLst>
+                <a:gs pos="0">
+                  <a:srgbClr val="20989B">
+                    <a:alpha val="100000"/>
+                  </a:srgbClr>
+                </a:gs>
+                <a:gs pos="50000">
+                  <a:srgbClr val="C3FEFF">
+                    <a:alpha val="50500"/>
+                  </a:srgbClr>
+                </a:gs>
+                <a:gs pos="100000">
+                  <a:srgbClr val="F9FFFF">
+                    <a:alpha val="0"/>
+                  </a:srgbClr>
+                </a:gs>
+              </a:gsLst>
+              <a:lin ang="5400000"/>
+            </a:gradFill>
+          </p:spPr>
+        </p:sp>
+        <p:sp>
+          <p:nvSpPr>
+            <p:cNvPr id="15" name="TextBox 15"/>
+            <p:cNvSpPr txBox="1"/>
+            <p:nvPr/>
+          </p:nvSpPr>
+          <p:spPr>
+            <a:xfrm>
+              <a:off x="0" y="-57150"/>
+              <a:ext cx="233786" cy="2347704"/>
+            </a:xfrm>
+            <a:prstGeom prst="rect">
+              <a:avLst/>
+            </a:prstGeom>
+          </p:spPr>
+          <p:txBody>
+            <a:bodyPr lIns="50800" tIns="50800" rIns="50800" bIns="50800" rtlCol="0" anchor="ctr"/>
+            <a:lstStyle/>
+            <a:p>
+              <a:pPr algn="ctr">
+                <a:lnSpc>
+                  <a:spcPts val="2659"/>
+                </a:lnSpc>
+                <a:spcBef>
+                  <a:spcPct val="0"/>
+                </a:spcBef>
+              </a:pPr>
+              <a:endParaRPr/>
+            </a:p>
+          </p:txBody>
+        </p:sp>
+      </p:grpSp>
+      <p:grpSp>
+        <p:nvGrpSpPr>
+          <p:cNvPr id="16" name="Group 16"/>
+          <p:cNvGrpSpPr/>
+          <p:nvPr/>
+        </p:nvGrpSpPr>
+        <p:grpSpPr>
+          <a:xfrm rot="-1168322">
+            <a:off x="7299902" y="5618795"/>
+            <a:ext cx="887655" cy="5600547"/>
+            <a:chOff x="0" y="0"/>
+            <a:chExt cx="233786" cy="1475041"/>
+          </a:xfrm>
+        </p:grpSpPr>
+        <p:sp>
+          <p:nvSpPr>
+            <p:cNvPr id="17" name="Freeform 17"/>
+            <p:cNvSpPr/>
+            <p:nvPr/>
+          </p:nvSpPr>
+          <p:spPr>
+            <a:xfrm>
+              <a:off x="0" y="0"/>
+              <a:ext cx="233786" cy="1475041"/>
+            </a:xfrm>
+            <a:custGeom>
+              <a:avLst/>
+              <a:gdLst/>
+              <a:ahLst/>
+              <a:cxnLst/>
+              <a:rect l="l" t="t" r="r" b="b"/>
+              <a:pathLst>
+                <a:path w="233786" h="1475041">
+                  <a:moveTo>
+                    <a:pt x="0" y="0"/>
+                  </a:moveTo>
+                  <a:lnTo>
+                    <a:pt x="233786" y="0"/>
+                  </a:lnTo>
+                  <a:lnTo>
+                    <a:pt x="233786" y="1475041"/>
+                  </a:lnTo>
+                  <a:lnTo>
+                    <a:pt x="0" y="1475041"/>
+                  </a:lnTo>
+                  <a:close/>
+                </a:path>
+              </a:pathLst>
+            </a:custGeom>
+            <a:gradFill rotWithShape="1">
+              <a:gsLst>
+                <a:gs pos="0">
+                  <a:srgbClr val="F9FFFF">
+                    <a:alpha val="0"/>
+                  </a:srgbClr>
+                </a:gs>
+                <a:gs pos="50000">
+                  <a:srgbClr val="C3FEFF">
+                    <a:alpha val="50500"/>
+                  </a:srgbClr>
+                </a:gs>
+                <a:gs pos="100000">
+                  <a:srgbClr val="20989B">
+                    <a:alpha val="100000"/>
+                  </a:srgbClr>
+                </a:gs>
+              </a:gsLst>
+              <a:lin ang="5400000"/>
+            </a:gradFill>
+          </p:spPr>
+        </p:sp>
+        <p:sp>
+          <p:nvSpPr>
+            <p:cNvPr id="18" name="TextBox 18"/>
+            <p:cNvSpPr txBox="1"/>
+            <p:nvPr/>
+          </p:nvSpPr>
+          <p:spPr>
+            <a:xfrm>
+              <a:off x="0" y="-57150"/>
+              <a:ext cx="233786" cy="1532191"/>
+            </a:xfrm>
+            <a:prstGeom prst="rect">
+              <a:avLst/>
+            </a:prstGeom>
+          </p:spPr>
+          <p:txBody>
+            <a:bodyPr lIns="50800" tIns="50800" rIns="50800" bIns="50800" rtlCol="0" anchor="ctr"/>
+            <a:lstStyle/>
+            <a:p>
+              <a:pPr algn="ctr">
+                <a:lnSpc>
+                  <a:spcPts val="2659"/>
+                </a:lnSpc>
+                <a:spcBef>
+                  <a:spcPct val="0"/>
+                </a:spcBef>
+              </a:pPr>
+              <a:endParaRPr/>
+            </a:p>
+          </p:txBody>
+        </p:sp>
+      </p:grpSp>
+      <p:sp>
+        <p:nvSpPr>
+          <p:cNvPr id="19" name="Freeform 19"/>
+          <p:cNvSpPr/>
+          <p:nvPr/>
+        </p:nvSpPr>
+        <p:spPr>
+          <a:xfrm>
+            <a:off x="322406" y="8252378"/>
+            <a:ext cx="1014510" cy="1005922"/>
+          </a:xfrm>
+          <a:custGeom>
+            <a:avLst/>
+            <a:gdLst/>
+            <a:ahLst/>
+            <a:cxnLst/>
+            <a:rect l="l" t="t" r="r" b="b"/>
+            <a:pathLst>
+              <a:path w="1014510" h="1005922">
+                <a:moveTo>
+                  <a:pt x="0" y="0"/>
+                </a:moveTo>
+                <a:lnTo>
+                  <a:pt x="1014510" y="0"/>
+                </a:lnTo>
+                <a:lnTo>
+                  <a:pt x="1014510" y="1005922"/>
+                </a:lnTo>
+                <a:lnTo>
+                  <a:pt x="0" y="1005922"/>
+                </a:lnTo>
+                <a:lnTo>
+                  <a:pt x="0" y="0"/>
+                </a:lnTo>
+                <a:close/>
+              </a:path>
+            </a:pathLst>
+          </a:custGeom>
+          <a:blipFill>
+            <a:blip r:embed="rId6">
+              <a:extLst>
+                <a:ext uri="{96DAC541-7B7A-43D3-8B79-37D633B846F1}">
+                  <asvg:svgBlip xmlns="" xmlns:asvg="http://schemas.microsoft.com/office/drawing/2016/SVG/main" r:embed="rId9"/>
+                </a:ext>
+              </a:extLst>
+            </a:blip>
+            <a:stretch>
+              <a:fillRect t="-106388" r="-103152"/>
+            </a:stretch>
+          </a:blipFill>
+        </p:spPr>
+      </p:sp>
+      <p:sp>
+        <p:nvSpPr>
+          <p:cNvPr id="20" name="Freeform 20"/>
+          <p:cNvSpPr/>
+          <p:nvPr/>
+        </p:nvSpPr>
+        <p:spPr>
+          <a:xfrm>
+            <a:off x="2631539" y="1080376"/>
+            <a:ext cx="1764021" cy="1764021"/>
+          </a:xfrm>
+          <a:custGeom>
+            <a:avLst/>
+            <a:gdLst/>
+            <a:ahLst/>
+            <a:cxnLst/>
+            <a:rect l="l" t="t" r="r" b="b"/>
+            <a:pathLst>
+              <a:path w="1764021" h="1764021">
+                <a:moveTo>
+                  <a:pt x="0" y="0"/>
+                </a:moveTo>
+                <a:lnTo>
+                  <a:pt x="1764021" y="0"/>
+                </a:lnTo>
+                <a:lnTo>
+                  <a:pt x="1764021" y="1764020"/>
+                </a:lnTo>
+                <a:lnTo>
+                  <a:pt x="0" y="1764020"/>
+                </a:lnTo>
+                <a:lnTo>
+                  <a:pt x="0" y="0"/>
+                </a:lnTo>
+                <a:close/>
+              </a:path>
+            </a:pathLst>
+          </a:custGeom>
+          <a:blipFill>
+            <a:blip r:embed="rId10">
+              <a:alphaModFix amt="44999"/>
+              <a:extLst>
+                <a:ext uri="{96DAC541-7B7A-43D3-8B79-37D633B846F1}">
+                  <asvg:svgBlip xmlns="" xmlns:asvg="http://schemas.microsoft.com/office/drawing/2016/SVG/main" r:embed="rId11"/>
+                </a:ext>
+              </a:extLst>
+            </a:blip>
+            <a:stretch>
+              <a:fillRect/>
+            </a:stretch>
+          </a:blipFill>
+        </p:spPr>
+      </p:sp>
+      <p:sp>
+        <p:nvSpPr>
+          <p:cNvPr id="21" name="Freeform 21"/>
+          <p:cNvSpPr/>
+          <p:nvPr/>
+        </p:nvSpPr>
+        <p:spPr>
+          <a:xfrm>
+            <a:off x="4953811" y="5004084"/>
+            <a:ext cx="4591447" cy="4583099"/>
+          </a:xfrm>
+          <a:custGeom>
+            <a:avLst/>
+            <a:gdLst/>
+            <a:ahLst/>
+            <a:cxnLst/>
+            <a:rect l="l" t="t" r="r" b="b"/>
+            <a:pathLst>
+              <a:path w="4591447" h="4583099">
+                <a:moveTo>
+                  <a:pt x="0" y="0"/>
+                </a:moveTo>
+                <a:lnTo>
+                  <a:pt x="4591448" y="0"/>
+                </a:lnTo>
+                <a:lnTo>
+                  <a:pt x="4591448" y="4583100"/>
+                </a:lnTo>
+                <a:lnTo>
+                  <a:pt x="0" y="4583100"/>
+                </a:lnTo>
+                <a:lnTo>
+                  <a:pt x="0" y="0"/>
+                </a:lnTo>
+                <a:close/>
+              </a:path>
+            </a:pathLst>
+          </a:custGeom>
+          <a:blipFill>
+            <a:blip r:embed="rId12"/>
+            <a:stretch>
+              <a:fillRect/>
+            </a:stretch>
+          </a:blipFill>
+        </p:spPr>
+      </p:sp>
+      <p:grpSp>
+        <p:nvGrpSpPr>
+          <p:cNvPr id="22" name="Group 22"/>
+          <p:cNvGrpSpPr/>
+          <p:nvPr/>
+        </p:nvGrpSpPr>
+        <p:grpSpPr>
+          <a:xfrm>
+            <a:off x="5269577" y="5332968"/>
+            <a:ext cx="3925332" cy="3925332"/>
+            <a:chOff x="0" y="0"/>
+            <a:chExt cx="812800" cy="812800"/>
+          </a:xfrm>
+        </p:grpSpPr>
+        <p:sp>
+          <p:nvSpPr>
+            <p:cNvPr id="23" name="Freeform 23"/>
+            <p:cNvSpPr/>
+            <p:nvPr/>
+          </p:nvSpPr>
+          <p:spPr>
+            <a:xfrm>
+              <a:off x="0" y="0"/>
+              <a:ext cx="812800" cy="812800"/>
+            </a:xfrm>
+            <a:custGeom>
+              <a:avLst/>
+              <a:gdLst/>
+              <a:ahLst/>
+              <a:cxnLst/>
+              <a:rect l="l" t="t" r="r" b="b"/>
+              <a:pathLst>
+                <a:path w="812800" h="812800">
+                  <a:moveTo>
+                    <a:pt x="406400" y="0"/>
+                  </a:moveTo>
+                  <a:cubicBezTo>
+                    <a:pt x="181951" y="0"/>
+                    <a:pt x="0" y="181951"/>
+                    <a:pt x="0" y="406400"/>
+                  </a:cubicBezTo>
+                  <a:cubicBezTo>
+                    <a:pt x="0" y="630849"/>
+                    <a:pt x="181951" y="812800"/>
+                    <a:pt x="406400" y="812800"/>
+                  </a:cubicBezTo>
+                  <a:cubicBezTo>
+                    <a:pt x="630849" y="812800"/>
+                    <a:pt x="812800" y="630849"/>
+                    <a:pt x="812800" y="406400"/>
+                  </a:cubicBezTo>
+                  <a:cubicBezTo>
+                    <a:pt x="812800" y="181951"/>
+                    <a:pt x="630849" y="0"/>
+                    <a:pt x="406400" y="0"/>
+                  </a:cubicBezTo>
+                  <a:close/>
+                </a:path>
+              </a:pathLst>
+            </a:custGeom>
+            <a:solidFill>
+              <a:srgbClr val="20989B"/>
+            </a:solidFill>
+          </p:spPr>
+        </p:sp>
+        <p:sp>
+          <p:nvSpPr>
+            <p:cNvPr id="24" name="TextBox 24"/>
+            <p:cNvSpPr txBox="1"/>
+            <p:nvPr/>
+          </p:nvSpPr>
+          <p:spPr>
+            <a:xfrm>
+              <a:off x="76200" y="19050"/>
+              <a:ext cx="660400" cy="717550"/>
+            </a:xfrm>
+            <a:prstGeom prst="rect">
+              <a:avLst/>
+            </a:prstGeom>
+          </p:spPr>
+          <p:txBody>
+            <a:bodyPr lIns="50800" tIns="50800" rIns="50800" bIns="50800" rtlCol="0" anchor="ctr"/>
+            <a:lstStyle/>
+            <a:p>
+              <a:pPr algn="ctr">
+                <a:lnSpc>
+                  <a:spcPts val="2659"/>
+                </a:lnSpc>
+              </a:pPr>
+              <a:endParaRPr/>
+            </a:p>
+          </p:txBody>
+        </p:sp>
+      </p:grpSp>
+      <p:grpSp>
+        <p:nvGrpSpPr>
+          <p:cNvPr id="25" name="Group 25"/>
+          <p:cNvGrpSpPr/>
+          <p:nvPr/>
+        </p:nvGrpSpPr>
+        <p:grpSpPr>
+          <a:xfrm>
+            <a:off x="5505087" y="5568478"/>
+            <a:ext cx="3454312" cy="3454312"/>
+            <a:chOff x="0" y="0"/>
+            <a:chExt cx="812800" cy="812800"/>
+          </a:xfrm>
+        </p:grpSpPr>
+        <p:sp>
+          <p:nvSpPr>
+            <p:cNvPr id="26" name="Freeform 26"/>
+            <p:cNvSpPr/>
+            <p:nvPr/>
+          </p:nvSpPr>
+          <p:spPr>
+            <a:xfrm>
+              <a:off x="0" y="0"/>
+              <a:ext cx="812800" cy="812800"/>
+            </a:xfrm>
+            <a:custGeom>
+              <a:avLst/>
+              <a:gdLst/>
+              <a:ahLst/>
+              <a:cxnLst/>
+              <a:rect l="l" t="t" r="r" b="b"/>
+              <a:pathLst>
+                <a:path w="812800" h="812800">
+                  <a:moveTo>
+                    <a:pt x="406400" y="0"/>
+                  </a:moveTo>
+                  <a:cubicBezTo>
+                    <a:pt x="181951" y="0"/>
+                    <a:pt x="0" y="181951"/>
+                    <a:pt x="0" y="406400"/>
+                  </a:cubicBezTo>
+                  <a:cubicBezTo>
+                    <a:pt x="0" y="630849"/>
+                    <a:pt x="181951" y="812800"/>
+                    <a:pt x="406400" y="812800"/>
+                  </a:cubicBezTo>
+                  <a:cubicBezTo>
+                    <a:pt x="630849" y="812800"/>
+                    <a:pt x="812800" y="630849"/>
+                    <a:pt x="812800" y="406400"/>
+                  </a:cubicBezTo>
+                  <a:cubicBezTo>
+                    <a:pt x="812800" y="181951"/>
+                    <a:pt x="630849" y="0"/>
+                    <a:pt x="406400" y="0"/>
+                  </a:cubicBezTo>
+                  <a:close/>
+                </a:path>
+              </a:pathLst>
+            </a:custGeom>
+            <a:blipFill>
+              <a:blip r:embed="rId13"/>
+              <a:stretch>
+                <a:fillRect l="-25000" r="-25000"/>
+              </a:stretch>
+            </a:blipFill>
+          </p:spPr>
+        </p:sp>
+      </p:grpSp>
+      <p:sp>
+        <p:nvSpPr>
+          <p:cNvPr id="28" name="Freeform 28"/>
+          <p:cNvSpPr/>
+          <p:nvPr/>
+        </p:nvSpPr>
+        <p:spPr>
+          <a:xfrm>
+            <a:off x="7183577" y="1662427"/>
+            <a:ext cx="1775822" cy="216327"/>
+          </a:xfrm>
+          <a:custGeom>
+            <a:avLst/>
+            <a:gdLst/>
+            <a:ahLst/>
+            <a:cxnLst/>
+            <a:rect l="l" t="t" r="r" b="b"/>
+            <a:pathLst>
+              <a:path w="1775822" h="216327">
+                <a:moveTo>
+                  <a:pt x="0" y="0"/>
+                </a:moveTo>
+                <a:lnTo>
+                  <a:pt x="1775822" y="0"/>
+                </a:lnTo>
+                <a:lnTo>
+                  <a:pt x="1775822" y="216327"/>
+                </a:lnTo>
+                <a:lnTo>
+                  <a:pt x="0" y="216327"/>
+                </a:lnTo>
+                <a:lnTo>
+                  <a:pt x="0" y="0"/>
+                </a:lnTo>
+                <a:close/>
+              </a:path>
+            </a:pathLst>
+          </a:custGeom>
+          <a:blipFill>
+            <a:blip r:embed="rId14">
+              <a:extLst>
+                <a:ext uri="{96DAC541-7B7A-43D3-8B79-37D633B846F1}">
+                  <asvg:svgBlip xmlns="" xmlns:asvg="http://schemas.microsoft.com/office/drawing/2016/SVG/main" r:embed="rId17"/>
+                </a:ext>
+              </a:extLst>
+            </a:blip>
+            <a:stretch>
+              <a:fillRect/>
+            </a:stretch>
+          </a:blipFill>
+        </p:spPr>
+      </p:sp>
+      <p:sp>
+        <p:nvSpPr>
+          <p:cNvPr id="30" name="TextBox 30"/>
+          <p:cNvSpPr txBox="1"/>
+          <p:nvPr/>
+        </p:nvSpPr>
+        <p:spPr>
+          <a:xfrm>
+            <a:off x="11752420" y="8737432"/>
+            <a:ext cx="4530391" cy="359073"/>
+          </a:xfrm>
+          <a:prstGeom prst="rect">
+            <a:avLst/>
+          </a:prstGeom>
+        </p:spPr>
+        <p:txBody>
+          <a:bodyPr lIns="0" tIns="0" rIns="0" bIns="0" rtlCol="0" anchor="t">
+            <a:spAutoFit/>
+          </a:bodyPr>
+          <a:lstStyle/>
+          <a:p>
+            <a:pPr algn="r">
+              <a:lnSpc>
+                <a:spcPts val="2849"/>
+              </a:lnSpc>
+            </a:pPr>
+            <a:r>
+              <a:rPr lang="en-US" sz="2499" b="1" smtClean="0">
+                <a:solidFill>
+                  <a:srgbClr val="000000"/>
+                </a:solidFill>
+                <a:latin typeface="Poppins Bold"/>
+                <a:ea typeface="Poppins Bold"/>
+                <a:cs typeface="Poppins Bold"/>
+                <a:sym typeface="Poppins Bold"/>
+              </a:rPr>
+              <a:t>Anh.ntm</a:t>
+            </a:r>
+            <a:endParaRPr lang="en-US" sz="2499" b="1">
+              <a:solidFill>
+                <a:srgbClr val="000000"/>
+              </a:solidFill>
+              <a:latin typeface="Poppins Bold"/>
+              <a:ea typeface="Poppins Bold"/>
+              <a:cs typeface="Poppins Bold"/>
+              <a:sym typeface="Poppins Bold"/>
+            </a:endParaRPr>
+          </a:p>
+        </p:txBody>
+      </p:sp>
+      <p:sp>
+        <p:nvSpPr>
+          <p:cNvPr id="33" name="TextBox 33"/>
+          <p:cNvSpPr txBox="1"/>
+          <p:nvPr/>
+        </p:nvSpPr>
+        <p:spPr>
+          <a:xfrm>
+            <a:off x="8194185" y="2341367"/>
+            <a:ext cx="9065115" cy="3263265"/>
+          </a:xfrm>
+          <a:prstGeom prst="rect">
+            <a:avLst/>
+          </a:prstGeom>
+        </p:spPr>
+        <p:txBody>
+          <a:bodyPr lIns="0" tIns="0" rIns="0" bIns="0" rtlCol="0" anchor="t">
+            <a:spAutoFit/>
+          </a:bodyPr>
+          <a:lstStyle/>
+          <a:p>
+            <a:pPr algn="r">
+              <a:lnSpc>
+                <a:spcPts val="23730"/>
+              </a:lnSpc>
+            </a:pPr>
+            <a:r>
+              <a:rPr lang="en-US" sz="21000" b="1" spc="-882">
+                <a:solidFill>
+                  <a:srgbClr val="20989B"/>
+                </a:solidFill>
+                <a:latin typeface="Poppins Semi-Bold"/>
+                <a:ea typeface="Poppins Semi-Bold"/>
+                <a:cs typeface="Poppins Semi-Bold"/>
+                <a:sym typeface="Poppins Semi-Bold"/>
+              </a:rPr>
+              <a:t>THANK</a:t>
+            </a:r>
+          </a:p>
+        </p:txBody>
+      </p:sp>
+      <p:sp>
+        <p:nvSpPr>
+          <p:cNvPr id="34" name="TextBox 34"/>
+          <p:cNvSpPr txBox="1"/>
+          <p:nvPr/>
+        </p:nvSpPr>
+        <p:spPr>
+          <a:xfrm>
+            <a:off x="11107618" y="4615693"/>
+            <a:ext cx="6151682" cy="3263265"/>
+          </a:xfrm>
+          <a:prstGeom prst="rect">
+            <a:avLst/>
+          </a:prstGeom>
+        </p:spPr>
+        <p:txBody>
+          <a:bodyPr lIns="0" tIns="0" rIns="0" bIns="0" rtlCol="0" anchor="t">
+            <a:spAutoFit/>
+          </a:bodyPr>
+          <a:lstStyle/>
+          <a:p>
+            <a:pPr algn="r">
+              <a:lnSpc>
+                <a:spcPts val="23730"/>
+              </a:lnSpc>
+            </a:pPr>
+            <a:r>
+              <a:rPr lang="en-US" sz="21000" b="1" spc="-882">
+                <a:solidFill>
+                  <a:srgbClr val="39515A"/>
+                </a:solidFill>
+                <a:latin typeface="Poppins Semi-Bold"/>
+                <a:ea typeface="Poppins Semi-Bold"/>
+                <a:cs typeface="Poppins Semi-Bold"/>
+                <a:sym typeface="Poppins Semi-Bold"/>
+              </a:rPr>
+              <a:t>YOU</a:t>
+            </a:r>
+          </a:p>
+        </p:txBody>
+      </p:sp>
+    </p:spTree>
+  </p:cSld>
+  <p:clrMapOvr>
+    <a:masterClrMapping/>
+  </p:clrMapOvr>
+  <p:timing>
+    <p:tnLst>
+      <p:par>
+        <p:cTn id="1" dur="indefinite" restart="never" nodeType="tmRoot"/>
+      </p:par>
+    </p:tnLst>
+  </p:timing>
+</p:sld>
+</file>
+
+<file path=ppt/slides/slide2.xml><?xml version="1.0" encoding="utf-8"?>
+<p:sld xmlns:a="http://schemas.openxmlformats.org/drawingml/2006/main" xmlns:r="http://schemas.openxmlformats.org/officeDocument/2006/relationships" xmlns:p="http://schemas.openxmlformats.org/presentationml/2006/main">
+  <p:cSld>
+    <p:spTree>
+      <p:nvGrpSpPr>
+        <p:cNvPr id="1" name=""/>
+        <p:cNvGrpSpPr/>
+        <p:nvPr/>
+      </p:nvGrpSpPr>
+      <p:grpSpPr>
+        <a:xfrm>
+          <a:off x="0" y="0"/>
+          <a:ext cx="0" cy="0"/>
+          <a:chOff x="0" y="0"/>
+          <a:chExt cx="0" cy="0"/>
+        </a:xfrm>
+      </p:grpSpPr>
+      <p:sp>
+        <p:nvSpPr>
+          <p:cNvPr id="2" name="Freeform 2"/>
+          <p:cNvSpPr/>
+          <p:nvPr/>
+        </p:nvSpPr>
+        <p:spPr>
+          <a:xfrm flipH="1">
+            <a:off x="-7261192" y="6051085"/>
+            <a:ext cx="24520492" cy="4402586"/>
+          </a:xfrm>
+          <a:custGeom>
+            <a:avLst/>
+            <a:gdLst/>
+            <a:ahLst/>
+            <a:cxnLst/>
+            <a:rect l="l" t="t" r="r" b="b"/>
+            <a:pathLst>
+              <a:path w="24520492" h="4402586">
+                <a:moveTo>
+                  <a:pt x="24520492" y="0"/>
+                </a:moveTo>
+                <a:lnTo>
+                  <a:pt x="0" y="0"/>
+                </a:lnTo>
+                <a:lnTo>
+                  <a:pt x="0" y="4402586"/>
+                </a:lnTo>
+                <a:lnTo>
+                  <a:pt x="24520492" y="4402586"/>
+                </a:lnTo>
+                <a:lnTo>
+                  <a:pt x="24520492" y="0"/>
+                </a:lnTo>
+                <a:close/>
+              </a:path>
+            </a:pathLst>
+          </a:custGeom>
+          <a:blipFill>
+            <a:blip r:embed="rId2">
+              <a:alphaModFix amt="6000"/>
+              <a:extLst>
+                <a:ext uri="{96DAC541-7B7A-43D3-8B79-37D633B846F1}">
+                  <asvg:svgBlip xmlns="" xmlns:asvg="http://schemas.microsoft.com/office/drawing/2016/SVG/main" r:embed="rId3"/>
                 </a:ext>
               </a:extLst>
             </a:blip>
@@ -4789,7 +5885,7 @@
               <a:alphaModFix amt="44999"/>
               <a:extLst>
                 <a:ext uri="{96DAC541-7B7A-43D3-8B79-37D633B846F1}">
-                  <asvg:svgBlip xmlns:asvg="http://schemas.microsoft.com/office/drawing/2016/SVG/main" xmlns="" r:embed="rId7"/>
+                  <asvg:svgBlip xmlns="" xmlns:asvg="http://schemas.microsoft.com/office/drawing/2016/SVG/main" r:embed="rId7"/>
                 </a:ext>
               </a:extLst>
             </a:blip>
@@ -4841,7 +5937,7 @@
             <a:blip r:embed="rId8">
               <a:extLst>
                 <a:ext uri="{96DAC541-7B7A-43D3-8B79-37D633B846F1}">
-                  <asvg:svgBlip xmlns:asvg="http://schemas.microsoft.com/office/drawing/2016/SVG/main" xmlns="" r:embed="rId9"/>
+                  <asvg:svgBlip xmlns="" xmlns:asvg="http://schemas.microsoft.com/office/drawing/2016/SVG/main" r:embed="rId9"/>
                 </a:ext>
               </a:extLst>
             </a:blip>
@@ -5996,7 +7092,7 @@
               <a:alphaModFix amt="6000"/>
               <a:extLst>
                 <a:ext uri="{96DAC541-7B7A-43D3-8B79-37D633B846F1}">
-                  <asvg:svgBlip xmlns:asvg="http://schemas.microsoft.com/office/drawing/2016/SVG/main" xmlns="" r:embed="rId3"/>
+                  <asvg:svgBlip xmlns="" xmlns:asvg="http://schemas.microsoft.com/office/drawing/2016/SVG/main" r:embed="rId3"/>
                 </a:ext>
               </a:extLst>
             </a:blip>
@@ -6756,7 +7852,7 @@
               <a:alphaModFix amt="6000"/>
               <a:extLst>
                 <a:ext uri="{96DAC541-7B7A-43D3-8B79-37D633B846F1}">
-                  <asvg:svgBlip xmlns:asvg="http://schemas.microsoft.com/office/drawing/2016/SVG/main" xmlns="" r:embed="rId3"/>
+                  <asvg:svgBlip xmlns="" xmlns:asvg="http://schemas.microsoft.com/office/drawing/2016/SVG/main" r:embed="rId3"/>
                 </a:ext>
               </a:extLst>
             </a:blip>
@@ -7081,7 +8177,7 @@
             <a:blip r:embed="rId5">
               <a:extLst>
                 <a:ext uri="{96DAC541-7B7A-43D3-8B79-37D633B846F1}">
-                  <asvg:svgBlip xmlns="" xmlns:asvg="http://schemas.microsoft.com/office/drawing/2016/SVG/main" r:embed="rId10"/>
+                  <asvg:svgBlip xmlns:asvg="http://schemas.microsoft.com/office/drawing/2016/SVG/main" xmlns="" r:embed="rId10"/>
                 </a:ext>
               </a:extLst>
             </a:blip>
@@ -7306,7 +8402,7 @@
               <a:alphaModFix amt="44999"/>
               <a:extLst>
                 <a:ext uri="{96DAC541-7B7A-43D3-8B79-37D633B846F1}">
-                  <asvg:svgBlip xmlns:asvg="http://schemas.microsoft.com/office/drawing/2016/SVG/main" xmlns="" r:embed="rId7"/>
+                  <asvg:svgBlip xmlns="" xmlns:asvg="http://schemas.microsoft.com/office/drawing/2016/SVG/main" r:embed="rId7"/>
                 </a:ext>
               </a:extLst>
             </a:blip>
@@ -7463,7 +8559,7 @@
               <a:alphaModFix amt="6000"/>
               <a:extLst>
                 <a:ext uri="{96DAC541-7B7A-43D3-8B79-37D633B846F1}">
-                  <asvg:svgBlip xmlns:asvg="http://schemas.microsoft.com/office/drawing/2016/SVG/main" xmlns="" r:embed="rId3"/>
+                  <asvg:svgBlip xmlns="" xmlns:asvg="http://schemas.microsoft.com/office/drawing/2016/SVG/main" r:embed="rId3"/>
                 </a:ext>
               </a:extLst>
             </a:blip>
@@ -7788,7 +8884,7 @@
             <a:blip r:embed="rId5">
               <a:extLst>
                 <a:ext uri="{96DAC541-7B7A-43D3-8B79-37D633B846F1}">
-                  <asvg:svgBlip xmlns="" xmlns:asvg="http://schemas.microsoft.com/office/drawing/2016/SVG/main" r:embed="rId10"/>
+                  <asvg:svgBlip xmlns:asvg="http://schemas.microsoft.com/office/drawing/2016/SVG/main" xmlns="" r:embed="rId10"/>
                 </a:ext>
               </a:extLst>
             </a:blip>
@@ -8122,7 +9218,7 @@
               <a:alphaModFix amt="6000"/>
               <a:extLst>
                 <a:ext uri="{96DAC541-7B7A-43D3-8B79-37D633B846F1}">
-                  <asvg:svgBlip xmlns:asvg="http://schemas.microsoft.com/office/drawing/2016/SVG/main" xmlns="" r:embed="rId3"/>
+                  <asvg:svgBlip xmlns="" xmlns:asvg="http://schemas.microsoft.com/office/drawing/2016/SVG/main" r:embed="rId3"/>
                 </a:ext>
               </a:extLst>
             </a:blip>
@@ -8445,7 +9541,7 @@
             <a:blip r:embed="rId5">
               <a:extLst>
                 <a:ext uri="{96DAC541-7B7A-43D3-8B79-37D633B846F1}">
-                  <asvg:svgBlip xmlns="" xmlns:asvg="http://schemas.microsoft.com/office/drawing/2016/SVG/main" r:embed="rId10"/>
+                  <asvg:svgBlip xmlns:asvg="http://schemas.microsoft.com/office/drawing/2016/SVG/main" xmlns="" r:embed="rId10"/>
                 </a:ext>
               </a:extLst>
             </a:blip>
@@ -8620,7 +9716,7 @@
               <a:alphaModFix amt="6000"/>
               <a:extLst>
                 <a:ext uri="{96DAC541-7B7A-43D3-8B79-37D633B846F1}">
-                  <asvg:svgBlip xmlns:asvg="http://schemas.microsoft.com/office/drawing/2016/SVG/main" xmlns="" r:embed="rId3"/>
+                  <asvg:svgBlip xmlns="" xmlns:asvg="http://schemas.microsoft.com/office/drawing/2016/SVG/main" r:embed="rId3"/>
                 </a:ext>
               </a:extLst>
             </a:blip>
@@ -9465,7 +10561,7 @@
               <a:alphaModFix amt="6000"/>
               <a:extLst>
                 <a:ext uri="{96DAC541-7B7A-43D3-8B79-37D633B846F1}">
-                  <asvg:svgBlip xmlns:asvg="http://schemas.microsoft.com/office/drawing/2016/SVG/main" xmlns="" r:embed="rId3"/>
+                  <asvg:svgBlip xmlns="" xmlns:asvg="http://schemas.microsoft.com/office/drawing/2016/SVG/main" r:embed="rId3"/>
                 </a:ext>
               </a:extLst>
             </a:blip>
@@ -9690,7 +10786,7 @@
               <a:alphaModFix amt="44999"/>
               <a:extLst>
                 <a:ext uri="{96DAC541-7B7A-43D3-8B79-37D633B846F1}">
-                  <asvg:svgBlip xmlns:asvg="http://schemas.microsoft.com/office/drawing/2016/SVG/main" xmlns="" r:embed="rId7"/>
+                  <asvg:svgBlip xmlns="" xmlns:asvg="http://schemas.microsoft.com/office/drawing/2016/SVG/main" r:embed="rId7"/>
                 </a:ext>
               </a:extLst>
             </a:blip>
@@ -10270,7 +11366,7 @@
         </p:nvSpPr>
         <p:spPr>
           <a:xfrm flipH="1">
-            <a:off x="-2341491" y="6051085"/>
+            <a:off x="-2316910" y="6065035"/>
             <a:ext cx="24520492" cy="4402586"/>
           </a:xfrm>
           <a:custGeom>
@@ -10322,11 +11418,11 @@
           <p:nvPr/>
         </p:nvGrpSpPr>
         <p:grpSpPr>
-          <a:xfrm rot="-1168322">
-            <a:off x="-591160" y="-1840415"/>
-            <a:ext cx="7434779" cy="15382828"/>
+          <a:xfrm rot="-862888">
+            <a:off x="15827254" y="-3881126"/>
+            <a:ext cx="5429187" cy="15382828"/>
             <a:chOff x="0" y="0"/>
-            <a:chExt cx="1958131" cy="4051444"/>
+            <a:chExt cx="1429909" cy="4051444"/>
           </a:xfrm>
         </p:grpSpPr>
         <p:sp>
@@ -10338,7 +11434,7 @@
           <p:spPr>
             <a:xfrm>
               <a:off x="0" y="0"/>
-              <a:ext cx="1958131" cy="4051444"/>
+              <a:ext cx="1429909" cy="4051444"/>
             </a:xfrm>
             <a:custGeom>
               <a:avLst/>
@@ -10347,15 +11443,15 @@
               <a:cxnLst/>
               <a:rect l="l" t="t" r="r" b="b"/>
               <a:pathLst>
-                <a:path w="1958131" h="4051444">
+                <a:path w="1429909" h="4051444">
                   <a:moveTo>
                     <a:pt x="0" y="0"/>
                   </a:moveTo>
                   <a:lnTo>
-                    <a:pt x="1958131" y="0"/>
+                    <a:pt x="1429909" y="0"/>
                   </a:lnTo>
                   <a:lnTo>
-                    <a:pt x="1958131" y="4051444"/>
+                    <a:pt x="1429909" y="4051444"/>
                   </a:lnTo>
                   <a:lnTo>
                     <a:pt x="0" y="4051444"/>
@@ -10378,7 +11474,7 @@
           <p:spPr>
             <a:xfrm>
               <a:off x="0" y="-57150"/>
-              <a:ext cx="1958131" cy="4108594"/>
+              <a:ext cx="1429909" cy="4108594"/>
             </a:xfrm>
             <a:prstGeom prst="rect">
               <a:avLst/>
@@ -10408,8 +11504,8 @@
           <p:nvPr/>
         </p:nvSpPr>
         <p:spPr>
-          <a:xfrm rot="-6579275">
-            <a:off x="-3647729" y="4649456"/>
+          <a:xfrm rot="-6270710" flipV="1">
+            <a:off x="11455062" y="4514251"/>
             <a:ext cx="13353097" cy="404258"/>
           </a:xfrm>
           <a:custGeom>
@@ -10421,19 +11517,19 @@
             <a:pathLst>
               <a:path w="13353097" h="404258">
                 <a:moveTo>
-                  <a:pt x="0" y="0"/>
+                  <a:pt x="0" y="404258"/>
                 </a:moveTo>
+                <a:lnTo>
+                  <a:pt x="13353096" y="404258"/>
+                </a:lnTo>
                 <a:lnTo>
                   <a:pt x="13353096" y="0"/>
                 </a:lnTo>
                 <a:lnTo>
-                  <a:pt x="13353096" y="404258"/>
+                  <a:pt x="0" y="0"/>
                 </a:lnTo>
                 <a:lnTo>
                   <a:pt x="0" y="404258"/>
-                </a:lnTo>
-                <a:lnTo>
-                  <a:pt x="0" y="0"/>
                 </a:lnTo>
                 <a:close/>
               </a:path>
@@ -10454,11 +11550,11 @@
           <p:nvPr/>
         </p:nvGrpSpPr>
         <p:grpSpPr>
-          <a:xfrm rot="-1168322">
-            <a:off x="-4404526" y="-1840415"/>
-            <a:ext cx="7434779" cy="15382828"/>
+          <a:xfrm rot="-862888">
+            <a:off x="18088222" y="-3881126"/>
+            <a:ext cx="5429187" cy="15382828"/>
             <a:chOff x="0" y="0"/>
-            <a:chExt cx="1958131" cy="4051444"/>
+            <a:chExt cx="1429909" cy="4051444"/>
           </a:xfrm>
         </p:grpSpPr>
         <p:sp>
@@ -10470,7 +11566,7 @@
           <p:spPr>
             <a:xfrm>
               <a:off x="0" y="0"/>
-              <a:ext cx="1958131" cy="4051444"/>
+              <a:ext cx="1429909" cy="4051444"/>
             </a:xfrm>
             <a:custGeom>
               <a:avLst/>
@@ -10479,15 +11575,15 @@
               <a:cxnLst/>
               <a:rect l="l" t="t" r="r" b="b"/>
               <a:pathLst>
-                <a:path w="1958131" h="4051444">
+                <a:path w="1429909" h="4051444">
                   <a:moveTo>
                     <a:pt x="0" y="0"/>
                   </a:moveTo>
                   <a:lnTo>
-                    <a:pt x="1958131" y="0"/>
+                    <a:pt x="1429909" y="0"/>
                   </a:lnTo>
                   <a:lnTo>
-                    <a:pt x="1958131" y="4051444"/>
+                    <a:pt x="1429909" y="4051444"/>
                   </a:lnTo>
                   <a:lnTo>
                     <a:pt x="0" y="4051444"/>
@@ -10510,7 +11606,7 @@
           <p:spPr>
             <a:xfrm>
               <a:off x="0" y="-57150"/>
-              <a:ext cx="1958131" cy="4108594"/>
+              <a:ext cx="1429909" cy="4108594"/>
             </a:xfrm>
             <a:prstGeom prst="rect">
               <a:avLst/>
@@ -10540,11 +11636,11 @@
           <p:nvPr/>
         </p:nvGrpSpPr>
         <p:grpSpPr>
-          <a:xfrm>
-            <a:off x="592816" y="1461689"/>
-            <a:ext cx="6973020" cy="7363621"/>
+          <a:xfrm rot="-852149">
+            <a:off x="14691038" y="-1970389"/>
+            <a:ext cx="887655" cy="5727768"/>
             <a:chOff x="0" y="0"/>
-            <a:chExt cx="5960491" cy="6294374"/>
+            <a:chExt cx="233786" cy="1508548"/>
           </a:xfrm>
         </p:grpSpPr>
         <p:sp>
@@ -10555,8 +11651,8 @@
           </p:nvSpPr>
           <p:spPr>
             <a:xfrm>
-              <a:off x="0" y="-44"/>
-              <a:ext cx="5960480" cy="6294418"/>
+              <a:off x="0" y="0"/>
+              <a:ext cx="233786" cy="1508548"/>
             </a:xfrm>
             <a:custGeom>
               <a:avLst/>
@@ -10565,95 +11661,7 @@
               <a:cxnLst/>
               <a:rect l="l" t="t" r="r" b="b"/>
               <a:pathLst>
-                <a:path w="5960480" h="6294418">
-                  <a:moveTo>
-                    <a:pt x="4226814" y="1119549"/>
-                  </a:moveTo>
-                  <a:cubicBezTo>
-                    <a:pt x="4173601" y="967911"/>
-                    <a:pt x="4001770" y="815892"/>
-                    <a:pt x="3844798" y="781729"/>
-                  </a:cubicBezTo>
-                  <a:lnTo>
-                    <a:pt x="285369" y="6521"/>
-                  </a:lnTo>
-                  <a:cubicBezTo>
-                    <a:pt x="128397" y="-27642"/>
-                    <a:pt x="0" y="75863"/>
-                    <a:pt x="0" y="236518"/>
-                  </a:cubicBezTo>
-                  <a:lnTo>
-                    <a:pt x="0" y="6002318"/>
-                  </a:lnTo>
-                  <a:cubicBezTo>
-                    <a:pt x="0" y="6162973"/>
-                    <a:pt x="131445" y="6294418"/>
-                    <a:pt x="292100" y="6294418"/>
-                  </a:cubicBezTo>
-                  <a:lnTo>
-                    <a:pt x="5749544" y="6294418"/>
-                  </a:lnTo>
-                  <a:cubicBezTo>
-                    <a:pt x="5910199" y="6294418"/>
-                    <a:pt x="5998083" y="6170339"/>
-                    <a:pt x="5944997" y="6018828"/>
-                  </a:cubicBezTo>
-                  <a:lnTo>
-                    <a:pt x="4226814" y="1119549"/>
-                  </a:lnTo>
-                  <a:close/>
-                </a:path>
-              </a:pathLst>
-            </a:custGeom>
-            <a:blipFill>
-              <a:blip r:embed="rId5"/>
-              <a:stretch>
-                <a:fillRect l="-19013" t="-38177" r="-326" b="-31122"/>
-              </a:stretch>
-            </a:blipFill>
-            <a:ln w="114300" cap="sq">
-              <a:solidFill>
-                <a:srgbClr val="FFFFFF"/>
-              </a:solidFill>
-              <a:prstDash val="solid"/>
-              <a:miter/>
-            </a:ln>
-          </p:spPr>
-        </p:sp>
-      </p:grpSp>
-      <p:grpSp>
-        <p:nvGrpSpPr>
-          <p:cNvPr id="13" name="Group 13"/>
-          <p:cNvGrpSpPr/>
-          <p:nvPr/>
-        </p:nvGrpSpPr>
-        <p:grpSpPr>
-          <a:xfrm rot="-1168322">
-            <a:off x="4937715" y="-2713330"/>
-            <a:ext cx="887655" cy="8696949"/>
-            <a:chOff x="0" y="0"/>
-            <a:chExt cx="233786" cy="2290554"/>
-          </a:xfrm>
-        </p:grpSpPr>
-        <p:sp>
-          <p:nvSpPr>
-            <p:cNvPr id="14" name="Freeform 14"/>
-            <p:cNvSpPr/>
-            <p:nvPr/>
-          </p:nvSpPr>
-          <p:spPr>
-            <a:xfrm>
-              <a:off x="0" y="0"/>
-              <a:ext cx="233786" cy="2290554"/>
-            </a:xfrm>
-            <a:custGeom>
-              <a:avLst/>
-              <a:gdLst/>
-              <a:ahLst/>
-              <a:cxnLst/>
-              <a:rect l="l" t="t" r="r" b="b"/>
-              <a:pathLst>
-                <a:path w="233786" h="2290554">
+                <a:path w="233786" h="1508548">
                   <a:moveTo>
                     <a:pt x="0" y="0"/>
                   </a:moveTo>
@@ -10661,10 +11669,10 @@
                     <a:pt x="233786" y="0"/>
                   </a:lnTo>
                   <a:lnTo>
-                    <a:pt x="233786" y="2290554"/>
+                    <a:pt x="233786" y="1508548"/>
                   </a:lnTo>
                   <a:lnTo>
-                    <a:pt x="0" y="2290554"/>
+                    <a:pt x="0" y="1508548"/>
                   </a:lnTo>
                   <a:close/>
                 </a:path>
@@ -10694,14 +11702,14 @@
         </p:sp>
         <p:sp>
           <p:nvSpPr>
-            <p:cNvPr id="15" name="TextBox 15"/>
+            <p:cNvPr id="12" name="TextBox 12"/>
             <p:cNvSpPr txBox="1"/>
             <p:nvPr/>
           </p:nvSpPr>
           <p:spPr>
             <a:xfrm>
               <a:off x="0" y="-57150"/>
-              <a:ext cx="233786" cy="2347704"/>
+              <a:ext cx="233786" cy="1565698"/>
             </a:xfrm>
             <a:prstGeom prst="rect">
               <a:avLst/>
@@ -10724,30 +11732,80 @@
           </p:txBody>
         </p:sp>
       </p:grpSp>
+      <p:sp>
+        <p:nvSpPr>
+          <p:cNvPr id="13" name="TextBox 13"/>
+          <p:cNvSpPr txBox="1"/>
+          <p:nvPr/>
+        </p:nvSpPr>
+        <p:spPr>
+          <a:xfrm>
+            <a:off x="532636" y="1499161"/>
+            <a:ext cx="9410700" cy="961802"/>
+          </a:xfrm>
+          <a:prstGeom prst="rect">
+            <a:avLst/>
+          </a:prstGeom>
+        </p:spPr>
+        <p:txBody>
+          <a:bodyPr wrap="square" lIns="0" tIns="0" rIns="0" bIns="0" rtlCol="0" anchor="t">
+            <a:spAutoFit/>
+          </a:bodyPr>
+          <a:lstStyle/>
+          <a:p>
+            <a:pPr algn="l">
+              <a:lnSpc>
+                <a:spcPts val="7500"/>
+              </a:lnSpc>
+            </a:pPr>
+            <a:r>
+              <a:rPr lang="en-US" sz="7500" b="1" spc="-315" smtClean="0">
+                <a:solidFill>
+                  <a:srgbClr val="39515A"/>
+                </a:solidFill>
+                <a:latin typeface="Poppins Semi-Bold"/>
+                <a:ea typeface="Poppins Semi-Bold"/>
+                <a:cs typeface="Poppins Semi-Bold"/>
+                <a:sym typeface="Poppins Semi-Bold"/>
+              </a:rPr>
+              <a:t>RECOMMENDATION</a:t>
+            </a:r>
+            <a:endParaRPr lang="en-US" sz="7500" b="1" spc="-315">
+              <a:solidFill>
+                <a:srgbClr val="39515A"/>
+              </a:solidFill>
+              <a:latin typeface="Poppins Semi-Bold"/>
+              <a:ea typeface="Poppins Semi-Bold"/>
+              <a:cs typeface="Poppins Semi-Bold"/>
+              <a:sym typeface="Poppins Semi-Bold"/>
+            </a:endParaRPr>
+          </a:p>
+        </p:txBody>
+      </p:sp>
       <p:grpSp>
         <p:nvGrpSpPr>
-          <p:cNvPr id="16" name="Group 16"/>
+          <p:cNvPr id="17" name="Group 17"/>
           <p:cNvGrpSpPr/>
           <p:nvPr/>
         </p:nvGrpSpPr>
         <p:grpSpPr>
-          <a:xfrm rot="-1168322">
-            <a:off x="7299902" y="5618795"/>
-            <a:ext cx="887655" cy="5600547"/>
+          <a:xfrm>
+            <a:off x="10124422" y="6395071"/>
+            <a:ext cx="5115578" cy="825303"/>
             <a:chOff x="0" y="0"/>
-            <a:chExt cx="233786" cy="1475041"/>
+            <a:chExt cx="2519038" cy="406400"/>
           </a:xfrm>
         </p:grpSpPr>
         <p:sp>
           <p:nvSpPr>
-            <p:cNvPr id="17" name="Freeform 17"/>
+            <p:cNvPr id="18" name="Freeform 18"/>
             <p:cNvSpPr/>
             <p:nvPr/>
           </p:nvSpPr>
           <p:spPr>
             <a:xfrm>
               <a:off x="0" y="0"/>
-              <a:ext cx="233786" cy="1475041"/>
+              <a:ext cx="2519038" cy="406400"/>
             </a:xfrm>
             <a:custGeom>
               <a:avLst/>
@@ -10756,283 +11814,32 @@
               <a:cxnLst/>
               <a:rect l="l" t="t" r="r" b="b"/>
               <a:pathLst>
-                <a:path w="233786" h="1475041">
+                <a:path w="2519038" h="406400">
                   <a:moveTo>
-                    <a:pt x="0" y="0"/>
-                  </a:moveTo>
-                  <a:lnTo>
-                    <a:pt x="233786" y="0"/>
-                  </a:lnTo>
-                  <a:lnTo>
-                    <a:pt x="233786" y="1475041"/>
-                  </a:lnTo>
-                  <a:lnTo>
-                    <a:pt x="0" y="1475041"/>
-                  </a:lnTo>
-                  <a:close/>
-                </a:path>
-              </a:pathLst>
-            </a:custGeom>
-            <a:gradFill rotWithShape="1">
-              <a:gsLst>
-                <a:gs pos="0">
-                  <a:srgbClr val="F9FFFF">
-                    <a:alpha val="0"/>
-                  </a:srgbClr>
-                </a:gs>
-                <a:gs pos="50000">
-                  <a:srgbClr val="C3FEFF">
-                    <a:alpha val="50500"/>
-                  </a:srgbClr>
-                </a:gs>
-                <a:gs pos="100000">
-                  <a:srgbClr val="20989B">
-                    <a:alpha val="100000"/>
-                  </a:srgbClr>
-                </a:gs>
-              </a:gsLst>
-              <a:lin ang="5400000"/>
-            </a:gradFill>
-          </p:spPr>
-        </p:sp>
-        <p:sp>
-          <p:nvSpPr>
-            <p:cNvPr id="18" name="TextBox 18"/>
-            <p:cNvSpPr txBox="1"/>
-            <p:nvPr/>
-          </p:nvSpPr>
-          <p:spPr>
-            <a:xfrm>
-              <a:off x="0" y="-57150"/>
-              <a:ext cx="233786" cy="1532191"/>
-            </a:xfrm>
-            <a:prstGeom prst="rect">
-              <a:avLst/>
-            </a:prstGeom>
-          </p:spPr>
-          <p:txBody>
-            <a:bodyPr lIns="50800" tIns="50800" rIns="50800" bIns="50800" rtlCol="0" anchor="ctr"/>
-            <a:lstStyle/>
-            <a:p>
-              <a:pPr algn="ctr">
-                <a:lnSpc>
-                  <a:spcPts val="2659"/>
-                </a:lnSpc>
-                <a:spcBef>
-                  <a:spcPct val="0"/>
-                </a:spcBef>
-              </a:pPr>
-              <a:endParaRPr/>
-            </a:p>
-          </p:txBody>
-        </p:sp>
-      </p:grpSp>
-      <p:sp>
-        <p:nvSpPr>
-          <p:cNvPr id="19" name="Freeform 19"/>
-          <p:cNvSpPr/>
-          <p:nvPr/>
-        </p:nvSpPr>
-        <p:spPr>
-          <a:xfrm>
-            <a:off x="322406" y="8252378"/>
-            <a:ext cx="1014510" cy="1005922"/>
-          </a:xfrm>
-          <a:custGeom>
-            <a:avLst/>
-            <a:gdLst/>
-            <a:ahLst/>
-            <a:cxnLst/>
-            <a:rect l="l" t="t" r="r" b="b"/>
-            <a:pathLst>
-              <a:path w="1014510" h="1005922">
-                <a:moveTo>
-                  <a:pt x="0" y="0"/>
-                </a:moveTo>
-                <a:lnTo>
-                  <a:pt x="1014510" y="0"/>
-                </a:lnTo>
-                <a:lnTo>
-                  <a:pt x="1014510" y="1005922"/>
-                </a:lnTo>
-                <a:lnTo>
-                  <a:pt x="0" y="1005922"/>
-                </a:lnTo>
-                <a:lnTo>
-                  <a:pt x="0" y="0"/>
-                </a:lnTo>
-                <a:close/>
-              </a:path>
-            </a:pathLst>
-          </a:custGeom>
-          <a:blipFill>
-            <a:blip r:embed="rId6">
-              <a:extLst>
-                <a:ext uri="{96DAC541-7B7A-43D3-8B79-37D633B846F1}">
-                  <asvg:svgBlip xmlns:asvg="http://schemas.microsoft.com/office/drawing/2016/SVG/main" xmlns="" r:embed="rId9"/>
-                </a:ext>
-              </a:extLst>
-            </a:blip>
-            <a:stretch>
-              <a:fillRect t="-106388" r="-103152"/>
-            </a:stretch>
-          </a:blipFill>
-        </p:spPr>
-      </p:sp>
-      <p:sp>
-        <p:nvSpPr>
-          <p:cNvPr id="20" name="Freeform 20"/>
-          <p:cNvSpPr/>
-          <p:nvPr/>
-        </p:nvSpPr>
-        <p:spPr>
-          <a:xfrm>
-            <a:off x="2631539" y="1080376"/>
-            <a:ext cx="1764021" cy="1764021"/>
-          </a:xfrm>
-          <a:custGeom>
-            <a:avLst/>
-            <a:gdLst/>
-            <a:ahLst/>
-            <a:cxnLst/>
-            <a:rect l="l" t="t" r="r" b="b"/>
-            <a:pathLst>
-              <a:path w="1764021" h="1764021">
-                <a:moveTo>
-                  <a:pt x="0" y="0"/>
-                </a:moveTo>
-                <a:lnTo>
-                  <a:pt x="1764021" y="0"/>
-                </a:lnTo>
-                <a:lnTo>
-                  <a:pt x="1764021" y="1764020"/>
-                </a:lnTo>
-                <a:lnTo>
-                  <a:pt x="0" y="1764020"/>
-                </a:lnTo>
-                <a:lnTo>
-                  <a:pt x="0" y="0"/>
-                </a:lnTo>
-                <a:close/>
-              </a:path>
-            </a:pathLst>
-          </a:custGeom>
-          <a:blipFill>
-            <a:blip r:embed="rId10">
-              <a:alphaModFix amt="44999"/>
-              <a:extLst>
-                <a:ext uri="{96DAC541-7B7A-43D3-8B79-37D633B846F1}">
-                  <asvg:svgBlip xmlns:asvg="http://schemas.microsoft.com/office/drawing/2016/SVG/main" xmlns="" r:embed="rId11"/>
-                </a:ext>
-              </a:extLst>
-            </a:blip>
-            <a:stretch>
-              <a:fillRect/>
-            </a:stretch>
-          </a:blipFill>
-        </p:spPr>
-      </p:sp>
-      <p:sp>
-        <p:nvSpPr>
-          <p:cNvPr id="21" name="Freeform 21"/>
-          <p:cNvSpPr/>
-          <p:nvPr/>
-        </p:nvSpPr>
-        <p:spPr>
-          <a:xfrm>
-            <a:off x="4953811" y="5004084"/>
-            <a:ext cx="4591447" cy="4583099"/>
-          </a:xfrm>
-          <a:custGeom>
-            <a:avLst/>
-            <a:gdLst/>
-            <a:ahLst/>
-            <a:cxnLst/>
-            <a:rect l="l" t="t" r="r" b="b"/>
-            <a:pathLst>
-              <a:path w="4591447" h="4583099">
-                <a:moveTo>
-                  <a:pt x="0" y="0"/>
-                </a:moveTo>
-                <a:lnTo>
-                  <a:pt x="4591448" y="0"/>
-                </a:lnTo>
-                <a:lnTo>
-                  <a:pt x="4591448" y="4583100"/>
-                </a:lnTo>
-                <a:lnTo>
-                  <a:pt x="0" y="4583100"/>
-                </a:lnTo>
-                <a:lnTo>
-                  <a:pt x="0" y="0"/>
-                </a:lnTo>
-                <a:close/>
-              </a:path>
-            </a:pathLst>
-          </a:custGeom>
-          <a:blipFill>
-            <a:blip r:embed="rId12"/>
-            <a:stretch>
-              <a:fillRect/>
-            </a:stretch>
-          </a:blipFill>
-        </p:spPr>
-      </p:sp>
-      <p:grpSp>
-        <p:nvGrpSpPr>
-          <p:cNvPr id="22" name="Group 22"/>
-          <p:cNvGrpSpPr/>
-          <p:nvPr/>
-        </p:nvGrpSpPr>
-        <p:grpSpPr>
-          <a:xfrm>
-            <a:off x="5269577" y="5332968"/>
-            <a:ext cx="3925332" cy="3925332"/>
-            <a:chOff x="0" y="0"/>
-            <a:chExt cx="812800" cy="812800"/>
-          </a:xfrm>
-        </p:grpSpPr>
-        <p:sp>
-          <p:nvSpPr>
-            <p:cNvPr id="23" name="Freeform 23"/>
-            <p:cNvSpPr/>
-            <p:nvPr/>
-          </p:nvSpPr>
-          <p:spPr>
-            <a:xfrm>
-              <a:off x="0" y="0"/>
-              <a:ext cx="812800" cy="812800"/>
-            </a:xfrm>
-            <a:custGeom>
-              <a:avLst/>
-              <a:gdLst/>
-              <a:ahLst/>
-              <a:cxnLst/>
-              <a:rect l="l" t="t" r="r" b="b"/>
-              <a:pathLst>
-                <a:path w="812800" h="812800">
-                  <a:moveTo>
-                    <a:pt x="406400" y="0"/>
+                    <a:pt x="2315838" y="0"/>
                   </a:moveTo>
                   <a:cubicBezTo>
-                    <a:pt x="181951" y="0"/>
-                    <a:pt x="0" y="181951"/>
-                    <a:pt x="0" y="406400"/>
+                    <a:pt x="2428062" y="0"/>
+                    <a:pt x="2519038" y="90976"/>
+                    <a:pt x="2519038" y="203200"/>
                   </a:cubicBezTo>
                   <a:cubicBezTo>
-                    <a:pt x="0" y="630849"/>
-                    <a:pt x="181951" y="812800"/>
-                    <a:pt x="406400" y="812800"/>
+                    <a:pt x="2519038" y="315424"/>
+                    <a:pt x="2428062" y="406400"/>
+                    <a:pt x="2315838" y="406400"/>
+                  </a:cubicBezTo>
+                  <a:lnTo>
+                    <a:pt x="203200" y="406400"/>
+                  </a:lnTo>
+                  <a:cubicBezTo>
+                    <a:pt x="90976" y="406400"/>
+                    <a:pt x="0" y="315424"/>
+                    <a:pt x="0" y="203200"/>
                   </a:cubicBezTo>
                   <a:cubicBezTo>
-                    <a:pt x="630849" y="812800"/>
-                    <a:pt x="812800" y="630849"/>
-                    <a:pt x="812800" y="406400"/>
-                  </a:cubicBezTo>
-                  <a:cubicBezTo>
-                    <a:pt x="812800" y="181951"/>
-                    <a:pt x="630849" y="0"/>
-                    <a:pt x="406400" y="0"/>
+                    <a:pt x="0" y="90976"/>
+                    <a:pt x="90976" y="0"/>
+                    <a:pt x="203200" y="0"/>
                   </a:cubicBezTo>
                   <a:close/>
                 </a:path>
@@ -11045,14 +11852,14 @@
         </p:sp>
         <p:sp>
           <p:nvSpPr>
-            <p:cNvPr id="24" name="TextBox 24"/>
+            <p:cNvPr id="19" name="TextBox 19"/>
             <p:cNvSpPr txBox="1"/>
             <p:nvPr/>
           </p:nvSpPr>
           <p:spPr>
             <a:xfrm>
-              <a:off x="76200" y="19050"/>
-              <a:ext cx="660400" cy="717550"/>
+              <a:off x="0" y="-57150"/>
+              <a:ext cx="2519038" cy="463550"/>
             </a:xfrm>
             <a:prstGeom prst="rect">
               <a:avLst/>
@@ -11074,28 +11881,28 @@
       </p:grpSp>
       <p:grpSp>
         <p:nvGrpSpPr>
-          <p:cNvPr id="25" name="Group 25"/>
+          <p:cNvPr id="20" name="Group 20"/>
           <p:cNvGrpSpPr/>
           <p:nvPr/>
         </p:nvGrpSpPr>
         <p:grpSpPr>
           <a:xfrm>
-            <a:off x="5505087" y="5568478"/>
-            <a:ext cx="3454312" cy="3454312"/>
+            <a:off x="1028700" y="4127160"/>
+            <a:ext cx="4412511" cy="825303"/>
             <a:chOff x="0" y="0"/>
-            <a:chExt cx="812800" cy="812800"/>
+            <a:chExt cx="2172831" cy="406400"/>
           </a:xfrm>
         </p:grpSpPr>
         <p:sp>
           <p:nvSpPr>
-            <p:cNvPr id="26" name="Freeform 26"/>
+            <p:cNvPr id="21" name="Freeform 21"/>
             <p:cNvSpPr/>
             <p:nvPr/>
           </p:nvSpPr>
           <p:spPr>
             <a:xfrm>
               <a:off x="0" y="0"/>
-              <a:ext cx="812800" cy="812800"/>
+              <a:ext cx="2172831" cy="406400"/>
             </a:xfrm>
             <a:custGeom>
               <a:avLst/>
@@ -11104,105 +11911,178 @@
               <a:cxnLst/>
               <a:rect l="l" t="t" r="r" b="b"/>
               <a:pathLst>
-                <a:path w="812800" h="812800">
+                <a:path w="2172831" h="406400">
                   <a:moveTo>
-                    <a:pt x="406400" y="0"/>
+                    <a:pt x="1969631" y="0"/>
                   </a:moveTo>
                   <a:cubicBezTo>
-                    <a:pt x="181951" y="0"/>
-                    <a:pt x="0" y="181951"/>
-                    <a:pt x="0" y="406400"/>
+                    <a:pt x="2081855" y="0"/>
+                    <a:pt x="2172831" y="90976"/>
+                    <a:pt x="2172831" y="203200"/>
                   </a:cubicBezTo>
                   <a:cubicBezTo>
-                    <a:pt x="0" y="630849"/>
-                    <a:pt x="181951" y="812800"/>
-                    <a:pt x="406400" y="812800"/>
+                    <a:pt x="2172831" y="315424"/>
+                    <a:pt x="2081855" y="406400"/>
+                    <a:pt x="1969631" y="406400"/>
+                  </a:cubicBezTo>
+                  <a:lnTo>
+                    <a:pt x="203200" y="406400"/>
+                  </a:lnTo>
+                  <a:cubicBezTo>
+                    <a:pt x="90976" y="406400"/>
+                    <a:pt x="0" y="315424"/>
+                    <a:pt x="0" y="203200"/>
                   </a:cubicBezTo>
                   <a:cubicBezTo>
-                    <a:pt x="630849" y="812800"/>
-                    <a:pt x="812800" y="630849"/>
-                    <a:pt x="812800" y="406400"/>
-                  </a:cubicBezTo>
-                  <a:cubicBezTo>
-                    <a:pt x="812800" y="181951"/>
-                    <a:pt x="630849" y="0"/>
-                    <a:pt x="406400" y="0"/>
+                    <a:pt x="0" y="90976"/>
+                    <a:pt x="90976" y="0"/>
+                    <a:pt x="203200" y="0"/>
                   </a:cubicBezTo>
                   <a:close/>
                 </a:path>
               </a:pathLst>
             </a:custGeom>
-            <a:blipFill>
-              <a:blip r:embed="rId13"/>
-              <a:stretch>
-                <a:fillRect l="-25000" r="-25000"/>
-              </a:stretch>
-            </a:blipFill>
+            <a:solidFill>
+              <a:srgbClr val="20989B"/>
+            </a:solidFill>
           </p:spPr>
         </p:sp>
+        <p:sp>
+          <p:nvSpPr>
+            <p:cNvPr id="22" name="TextBox 22"/>
+            <p:cNvSpPr txBox="1"/>
+            <p:nvPr/>
+          </p:nvSpPr>
+          <p:spPr>
+            <a:xfrm>
+              <a:off x="0" y="-57150"/>
+              <a:ext cx="2172831" cy="463550"/>
+            </a:xfrm>
+            <a:prstGeom prst="rect">
+              <a:avLst/>
+            </a:prstGeom>
+          </p:spPr>
+          <p:txBody>
+            <a:bodyPr lIns="50800" tIns="50800" rIns="50800" bIns="50800" rtlCol="0" anchor="ctr"/>
+            <a:lstStyle/>
+            <a:p>
+              <a:pPr algn="ctr">
+                <a:lnSpc>
+                  <a:spcPts val="2659"/>
+                </a:lnSpc>
+              </a:pPr>
+              <a:endParaRPr/>
+            </a:p>
+          </p:txBody>
+        </p:sp>
       </p:grpSp>
-      <p:sp>
-        <p:nvSpPr>
-          <p:cNvPr id="28" name="Freeform 28"/>
-          <p:cNvSpPr/>
+      <p:grpSp>
+        <p:nvGrpSpPr>
+          <p:cNvPr id="23" name="Group 23"/>
+          <p:cNvGrpSpPr/>
+          <p:nvPr/>
+        </p:nvGrpSpPr>
+        <p:grpSpPr>
+          <a:xfrm>
+            <a:off x="8793310" y="2577021"/>
+            <a:ext cx="6653327" cy="825303"/>
+            <a:chOff x="0" y="0"/>
+            <a:chExt cx="2519038" cy="406400"/>
+          </a:xfrm>
+        </p:grpSpPr>
+        <p:sp>
+          <p:nvSpPr>
+            <p:cNvPr id="24" name="Freeform 24"/>
+            <p:cNvSpPr/>
+            <p:nvPr/>
+          </p:nvSpPr>
+          <p:spPr>
+            <a:xfrm>
+              <a:off x="0" y="0"/>
+              <a:ext cx="2519038" cy="406400"/>
+            </a:xfrm>
+            <a:custGeom>
+              <a:avLst/>
+              <a:gdLst/>
+              <a:ahLst/>
+              <a:cxnLst/>
+              <a:rect l="l" t="t" r="r" b="b"/>
+              <a:pathLst>
+                <a:path w="2519038" h="406400">
+                  <a:moveTo>
+                    <a:pt x="2315838" y="0"/>
+                  </a:moveTo>
+                  <a:cubicBezTo>
+                    <a:pt x="2428062" y="0"/>
+                    <a:pt x="2519038" y="90976"/>
+                    <a:pt x="2519038" y="203200"/>
+                  </a:cubicBezTo>
+                  <a:cubicBezTo>
+                    <a:pt x="2519038" y="315424"/>
+                    <a:pt x="2428062" y="406400"/>
+                    <a:pt x="2315838" y="406400"/>
+                  </a:cubicBezTo>
+                  <a:lnTo>
+                    <a:pt x="203200" y="406400"/>
+                  </a:lnTo>
+                  <a:cubicBezTo>
+                    <a:pt x="90976" y="406400"/>
+                    <a:pt x="0" y="315424"/>
+                    <a:pt x="0" y="203200"/>
+                  </a:cubicBezTo>
+                  <a:cubicBezTo>
+                    <a:pt x="0" y="90976"/>
+                    <a:pt x="90976" y="0"/>
+                    <a:pt x="203200" y="0"/>
+                  </a:cubicBezTo>
+                  <a:close/>
+                </a:path>
+              </a:pathLst>
+            </a:custGeom>
+            <a:solidFill>
+              <a:srgbClr val="20989B"/>
+            </a:solidFill>
+          </p:spPr>
+        </p:sp>
+        <p:sp>
+          <p:nvSpPr>
+            <p:cNvPr id="25" name="TextBox 25"/>
+            <p:cNvSpPr txBox="1"/>
+            <p:nvPr/>
+          </p:nvSpPr>
+          <p:spPr>
+            <a:xfrm>
+              <a:off x="0" y="-57150"/>
+              <a:ext cx="2519038" cy="463550"/>
+            </a:xfrm>
+            <a:prstGeom prst="rect">
+              <a:avLst/>
+            </a:prstGeom>
+          </p:spPr>
+          <p:txBody>
+            <a:bodyPr lIns="50800" tIns="50800" rIns="50800" bIns="50800" rtlCol="0" anchor="ctr"/>
+            <a:lstStyle/>
+            <a:p>
+              <a:pPr algn="ctr">
+                <a:lnSpc>
+                  <a:spcPts val="2659"/>
+                </a:lnSpc>
+              </a:pPr>
+              <a:endParaRPr/>
+            </a:p>
+          </p:txBody>
+        </p:sp>
+      </p:grpSp>
+      <p:sp>
+        <p:nvSpPr>
+          <p:cNvPr id="26" name="TextBox 26"/>
+          <p:cNvSpPr txBox="1"/>
           <p:nvPr/>
         </p:nvSpPr>
         <p:spPr>
           <a:xfrm>
-            <a:off x="7183577" y="1662427"/>
-            <a:ext cx="1775822" cy="216327"/>
-          </a:xfrm>
-          <a:custGeom>
-            <a:avLst/>
-            <a:gdLst/>
-            <a:ahLst/>
-            <a:cxnLst/>
-            <a:rect l="l" t="t" r="r" b="b"/>
-            <a:pathLst>
-              <a:path w="1775822" h="216327">
-                <a:moveTo>
-                  <a:pt x="0" y="0"/>
-                </a:moveTo>
-                <a:lnTo>
-                  <a:pt x="1775822" y="0"/>
-                </a:lnTo>
-                <a:lnTo>
-                  <a:pt x="1775822" y="216327"/>
-                </a:lnTo>
-                <a:lnTo>
-                  <a:pt x="0" y="216327"/>
-                </a:lnTo>
-                <a:lnTo>
-                  <a:pt x="0" y="0"/>
-                </a:lnTo>
-                <a:close/>
-              </a:path>
-            </a:pathLst>
-          </a:custGeom>
-          <a:blipFill>
-            <a:blip r:embed="rId14">
-              <a:extLst>
-                <a:ext uri="{96DAC541-7B7A-43D3-8B79-37D633B846F1}">
-                  <asvg:svgBlip xmlns:asvg="http://schemas.microsoft.com/office/drawing/2016/SVG/main" xmlns="" r:embed="rId17"/>
-                </a:ext>
-              </a:extLst>
-            </a:blip>
-            <a:stretch>
-              <a:fillRect/>
-            </a:stretch>
-          </a:blipFill>
-        </p:spPr>
-      </p:sp>
-      <p:sp>
-        <p:nvSpPr>
-          <p:cNvPr id="30" name="TextBox 30"/>
-          <p:cNvSpPr txBox="1"/>
-          <p:nvPr/>
-        </p:nvSpPr>
-        <p:spPr>
-          <a:xfrm>
-            <a:off x="11752420" y="8737432"/>
-            <a:ext cx="4530391" cy="359073"/>
+            <a:off x="10554341" y="6468311"/>
+            <a:ext cx="4255740" cy="577081"/>
           </a:xfrm>
           <a:prstGeom prst="rect">
             <a:avLst/>
@@ -11214,45 +12094,45 @@
           </a:bodyPr>
           <a:lstStyle/>
           <a:p>
-            <a:pPr algn="r">
+            <a:pPr algn="ctr">
               <a:lnSpc>
-                <a:spcPts val="2849"/>
+                <a:spcPts val="4519"/>
               </a:lnSpc>
             </a:pPr>
             <a:r>
-              <a:rPr lang="en-US" sz="2499" b="1" smtClean="0">
+              <a:rPr lang="en-US" sz="2400" b="1" spc="-167" smtClean="0">
                 <a:solidFill>
-                  <a:srgbClr val="000000"/>
+                  <a:srgbClr val="FFFFFF"/>
                 </a:solidFill>
-                <a:latin typeface="Poppins Bold"/>
-                <a:ea typeface="Poppins Bold"/>
-                <a:cs typeface="Poppins Bold"/>
-                <a:sym typeface="Poppins Bold"/>
+                <a:latin typeface="+mj-lt"/>
+                <a:ea typeface="Poppins Semi-Bold"/>
+                <a:cs typeface="Poppins Semi-Bold"/>
+                <a:sym typeface="Poppins Semi-Bold"/>
               </a:rPr>
-              <a:t>Anh.ntm</a:t>
-            </a:r>
-            <a:endParaRPr lang="en-US" sz="2499" b="1">
+              <a:t>Tối ưu danh mục sản phẩm</a:t>
+            </a:r>
+            <a:endParaRPr lang="en-US" sz="2400" b="1" spc="-167">
               <a:solidFill>
-                <a:srgbClr val="000000"/>
+                <a:srgbClr val="FFFFFF"/>
               </a:solidFill>
-              <a:latin typeface="Poppins Bold"/>
-              <a:ea typeface="Poppins Bold"/>
-              <a:cs typeface="Poppins Bold"/>
-              <a:sym typeface="Poppins Bold"/>
+              <a:latin typeface="+mj-lt"/>
+              <a:ea typeface="Poppins Semi-Bold"/>
+              <a:cs typeface="Poppins Semi-Bold"/>
+              <a:sym typeface="Poppins Semi-Bold"/>
             </a:endParaRPr>
           </a:p>
         </p:txBody>
       </p:sp>
       <p:sp>
         <p:nvSpPr>
-          <p:cNvPr id="33" name="TextBox 33"/>
+          <p:cNvPr id="27" name="TextBox 27"/>
           <p:cNvSpPr txBox="1"/>
           <p:nvPr/>
         </p:nvSpPr>
         <p:spPr>
           <a:xfrm>
-            <a:off x="8194185" y="2341367"/>
-            <a:ext cx="9065115" cy="3263265"/>
+            <a:off x="1458619" y="4217232"/>
+            <a:ext cx="3552673" cy="502510"/>
           </a:xfrm>
           <a:prstGeom prst="rect">
             <a:avLst/>
@@ -11264,68 +12144,351 @@
           </a:bodyPr>
           <a:lstStyle/>
           <a:p>
-            <a:pPr algn="r">
+            <a:pPr algn="ctr">
               <a:lnSpc>
-                <a:spcPts val="23730"/>
+                <a:spcPts val="4519"/>
               </a:lnSpc>
             </a:pPr>
             <a:r>
-              <a:rPr lang="en-US" sz="21000" b="1" spc="-882">
+              <a:rPr lang="en-US" sz="2400" b="1" spc="-167" smtClean="0">
                 <a:solidFill>
-                  <a:srgbClr val="20989B"/>
+                  <a:srgbClr val="FFFFFF"/>
                 </a:solidFill>
-                <a:latin typeface="Poppins Semi-Bold"/>
+                <a:latin typeface="+mj-lt"/>
                 <a:ea typeface="Poppins Semi-Bold"/>
                 <a:cs typeface="Poppins Semi-Bold"/>
                 <a:sym typeface="Poppins Semi-Bold"/>
               </a:rPr>
-              <a:t>THANK</a:t>
-            </a:r>
+              <a:t>Tối ưu kênh marketing</a:t>
+            </a:r>
+            <a:endParaRPr lang="en-US" sz="2400" b="1" spc="-167">
+              <a:solidFill>
+                <a:srgbClr val="FFFFFF"/>
+              </a:solidFill>
+              <a:latin typeface="+mj-lt"/>
+              <a:ea typeface="Poppins Semi-Bold"/>
+              <a:cs typeface="Poppins Semi-Bold"/>
+              <a:sym typeface="Poppins Semi-Bold"/>
+            </a:endParaRPr>
           </a:p>
         </p:txBody>
       </p:sp>
       <p:sp>
         <p:nvSpPr>
-          <p:cNvPr id="34" name="TextBox 34"/>
+          <p:cNvPr id="28" name="TextBox 28"/>
           <p:cNvSpPr txBox="1"/>
           <p:nvPr/>
         </p:nvSpPr>
         <p:spPr>
           <a:xfrm>
-            <a:off x="11107618" y="4615693"/>
-            <a:ext cx="6151682" cy="3263265"/>
+            <a:off x="8815896" y="2644763"/>
+            <a:ext cx="6630741" cy="502895"/>
           </a:xfrm>
           <a:prstGeom prst="rect">
             <a:avLst/>
           </a:prstGeom>
         </p:spPr>
         <p:txBody>
-          <a:bodyPr lIns="0" tIns="0" rIns="0" bIns="0" rtlCol="0" anchor="t">
+          <a:bodyPr wrap="square" lIns="0" tIns="0" rIns="0" bIns="0" rtlCol="0" anchor="t">
             <a:spAutoFit/>
           </a:bodyPr>
           <a:lstStyle/>
           <a:p>
-            <a:pPr algn="r">
+            <a:pPr algn="ctr">
               <a:lnSpc>
-                <a:spcPts val="23730"/>
+                <a:spcPts val="4519"/>
               </a:lnSpc>
             </a:pPr>
             <a:r>
-              <a:rPr lang="en-US" sz="21000" b="1" spc="-882">
+              <a:rPr lang="en-US" sz="2400" b="1" spc="-167" smtClean="0">
                 <a:solidFill>
-                  <a:srgbClr val="39515A"/>
+                  <a:srgbClr val="FFFFFF"/>
                 </a:solidFill>
-                <a:latin typeface="Poppins Semi-Bold"/>
+                <a:latin typeface="+mj-lt"/>
                 <a:ea typeface="Poppins Semi-Bold"/>
                 <a:cs typeface="Poppins Semi-Bold"/>
                 <a:sym typeface="Poppins Semi-Bold"/>
               </a:rPr>
-              <a:t>YOU</a:t>
+              <a:t>Tối ưu giai đoạn đầu funnel (Session </a:t>
+            </a:r>
+            <a:r>
+              <a:rPr lang="en-US" sz="2400" b="1" spc="-167" smtClean="0">
+                <a:solidFill>
+                  <a:srgbClr val="FFFFFF"/>
+                </a:solidFill>
+                <a:latin typeface="+mj-lt"/>
+                <a:ea typeface="Poppins Semi-Bold"/>
+                <a:cs typeface="Poppins Semi-Bold"/>
+                <a:sym typeface="Wingdings" panose="05000000000000000000" pitchFamily="2" charset="2"/>
+              </a:rPr>
+              <a:t> product)</a:t>
             </a:r>
           </a:p>
         </p:txBody>
       </p:sp>
+      <p:sp>
+        <p:nvSpPr>
+          <p:cNvPr id="29" name="TextBox 28"/>
+          <p:cNvSpPr txBox="1"/>
+          <p:nvPr/>
+        </p:nvSpPr>
+        <p:spPr>
+          <a:xfrm>
+            <a:off x="8991600" y="3695700"/>
+            <a:ext cx="6455037" cy="2169825"/>
+          </a:xfrm>
+          <a:prstGeom prst="rect">
+            <a:avLst/>
+          </a:prstGeom>
+          <a:noFill/>
+        </p:spPr>
+        <p:txBody>
+          <a:bodyPr wrap="square" rtlCol="0">
+            <a:spAutoFit/>
+          </a:bodyPr>
+          <a:lstStyle/>
+          <a:p>
+            <a:pPr marL="285750" indent="-285750" algn="just">
+              <a:lnSpc>
+                <a:spcPct val="150000"/>
+              </a:lnSpc>
+              <a:buFont typeface="Wingdings" panose="05000000000000000000" pitchFamily="2" charset="2"/>
+              <a:buChar char="v"/>
+            </a:pPr>
+            <a:r>
+              <a:rPr lang="en-US" b="1"/>
+              <a:t>T</a:t>
+            </a:r>
+            <a:r>
+              <a:rPr lang="vi-VN" b="1" smtClean="0"/>
+              <a:t>ối </a:t>
+            </a:r>
+            <a:r>
+              <a:rPr lang="vi-VN" b="1"/>
+              <a:t>ưu nội dung landing page</a:t>
+            </a:r>
+            <a:r>
+              <a:rPr lang="vi-VN"/>
+              <a:t>, cải thiện UX/UI và điều hướng người dùng đến trang </a:t>
+            </a:r>
+            <a:r>
+              <a:rPr lang="vi-VN"/>
+              <a:t>sản </a:t>
+            </a:r>
+            <a:r>
+              <a:rPr lang="vi-VN" smtClean="0"/>
+              <a:t>phẩm</a:t>
+            </a:r>
+            <a:endParaRPr lang="en-US" smtClean="0"/>
+          </a:p>
+          <a:p>
+            <a:pPr marL="285750" indent="-285750" algn="just">
+              <a:lnSpc>
+                <a:spcPct val="150000"/>
+              </a:lnSpc>
+              <a:buFont typeface="Wingdings" panose="05000000000000000000" pitchFamily="2" charset="2"/>
+              <a:buChar char="v"/>
+            </a:pPr>
+            <a:r>
+              <a:rPr lang="en-US" b="1" smtClean="0"/>
+              <a:t>Phân bổ lại traffic </a:t>
+            </a:r>
+            <a:r>
+              <a:rPr lang="en-US" smtClean="0"/>
+              <a:t>từ các trang có lưu lượng truy cập cao sang /lader-5</a:t>
+            </a:r>
+          </a:p>
+          <a:p>
+            <a:pPr marL="285750" indent="-285750" algn="just">
+              <a:lnSpc>
+                <a:spcPct val="150000"/>
+              </a:lnSpc>
+              <a:buFont typeface="Wingdings" panose="05000000000000000000" pitchFamily="2" charset="2"/>
+              <a:buChar char="v"/>
+            </a:pPr>
+            <a:r>
+              <a:rPr lang="en-US" smtClean="0"/>
+              <a:t>Thực hiện </a:t>
+            </a:r>
+            <a:r>
+              <a:rPr lang="en-US" b="1" smtClean="0"/>
+              <a:t>kiểm định A/B Testing </a:t>
+            </a:r>
+            <a:r>
+              <a:rPr lang="en-US" smtClean="0"/>
+              <a:t>các phiên bản lading page</a:t>
+            </a:r>
+            <a:endParaRPr lang="en-US"/>
+          </a:p>
+        </p:txBody>
+      </p:sp>
+      <p:sp>
+        <p:nvSpPr>
+          <p:cNvPr id="30" name="TextBox 29"/>
+          <p:cNvSpPr txBox="1"/>
+          <p:nvPr/>
+        </p:nvSpPr>
+        <p:spPr>
+          <a:xfrm>
+            <a:off x="532636" y="5448299"/>
+            <a:ext cx="6858764" cy="1754326"/>
+          </a:xfrm>
+          <a:prstGeom prst="rect">
+            <a:avLst/>
+          </a:prstGeom>
+          <a:noFill/>
+        </p:spPr>
+        <p:txBody>
+          <a:bodyPr wrap="square" rtlCol="0">
+            <a:spAutoFit/>
+          </a:bodyPr>
+          <a:lstStyle/>
+          <a:p>
+            <a:pPr marL="285750" indent="-285750" algn="just">
+              <a:lnSpc>
+                <a:spcPct val="150000"/>
+              </a:lnSpc>
+              <a:buFont typeface="Wingdings" panose="05000000000000000000" pitchFamily="2" charset="2"/>
+              <a:buChar char="v"/>
+            </a:pPr>
+            <a:r>
+              <a:rPr lang="en-US" smtClean="0"/>
+              <a:t>Giảm đầu tư vào các kênh có </a:t>
+            </a:r>
+            <a:r>
+              <a:rPr lang="en-US" b="1" smtClean="0"/>
+              <a:t>tỷ lệ chuyển đổi thấp </a:t>
+            </a:r>
+            <a:r>
+              <a:rPr lang="en-US" smtClean="0"/>
+              <a:t>(socialbook pilot)</a:t>
+            </a:r>
+          </a:p>
+          <a:p>
+            <a:pPr marL="285750" indent="-285750" algn="just">
+              <a:lnSpc>
+                <a:spcPct val="150000"/>
+              </a:lnSpc>
+              <a:buFont typeface="Wingdings" panose="05000000000000000000" pitchFamily="2" charset="2"/>
+              <a:buChar char="v"/>
+            </a:pPr>
+            <a:r>
+              <a:rPr lang="en-US"/>
+              <a:t>Tăng ngân sách cho </a:t>
+            </a:r>
+            <a:r>
+              <a:rPr lang="en-US" b="1"/>
+              <a:t>brand campaigns và kênh có </a:t>
+            </a:r>
+            <a:r>
+              <a:rPr lang="en-US" b="1"/>
+              <a:t>CR </a:t>
+            </a:r>
+            <a:r>
+              <a:rPr lang="en-US" b="1" smtClean="0"/>
+              <a:t>cao</a:t>
+            </a:r>
+          </a:p>
+          <a:p>
+            <a:pPr marL="285750" indent="-285750" algn="just">
+              <a:lnSpc>
+                <a:spcPct val="150000"/>
+              </a:lnSpc>
+              <a:buFont typeface="Wingdings" panose="05000000000000000000" pitchFamily="2" charset="2"/>
+              <a:buChar char="v"/>
+            </a:pPr>
+            <a:r>
+              <a:rPr lang="vi-VN"/>
+              <a:t>Tối ưu targeting để nâng cao chất lượng </a:t>
+            </a:r>
+            <a:r>
+              <a:rPr lang="vi-VN"/>
+              <a:t>traffic </a:t>
+            </a:r>
+            <a:endParaRPr lang="vi-VN"/>
+          </a:p>
+        </p:txBody>
+      </p:sp>
+      <p:sp>
+        <p:nvSpPr>
+          <p:cNvPr id="31" name="TextBox 30"/>
+          <p:cNvSpPr txBox="1"/>
+          <p:nvPr/>
+        </p:nvSpPr>
+        <p:spPr>
+          <a:xfrm>
+            <a:off x="9404929" y="7508217"/>
+            <a:ext cx="6139871" cy="1338828"/>
+          </a:xfrm>
+          <a:prstGeom prst="rect">
+            <a:avLst/>
+          </a:prstGeom>
+          <a:noFill/>
+        </p:spPr>
+        <p:txBody>
+          <a:bodyPr wrap="square" rtlCol="0">
+            <a:spAutoFit/>
+          </a:bodyPr>
+          <a:lstStyle/>
+          <a:p>
+            <a:pPr marL="285750" indent="-285750" algn="just">
+              <a:lnSpc>
+                <a:spcPct val="150000"/>
+              </a:lnSpc>
+              <a:buFont typeface="Wingdings" panose="05000000000000000000" pitchFamily="2" charset="2"/>
+              <a:buChar char="v"/>
+            </a:pPr>
+            <a:r>
+              <a:rPr lang="en-US"/>
+              <a:t>Kiểm tra và cải thiện các sản phẩm có </a:t>
+            </a:r>
+            <a:r>
+              <a:rPr lang="en-US" b="1"/>
+              <a:t>refund </a:t>
+            </a:r>
+            <a:r>
+              <a:rPr lang="en-US" b="1" smtClean="0"/>
+              <a:t>cao</a:t>
+            </a:r>
+          </a:p>
+          <a:p>
+            <a:pPr marL="285750" indent="-285750" algn="just">
+              <a:lnSpc>
+                <a:spcPct val="150000"/>
+              </a:lnSpc>
+              <a:buFont typeface="Wingdings" panose="05000000000000000000" pitchFamily="2" charset="2"/>
+              <a:buChar char="v"/>
+            </a:pPr>
+            <a:r>
+              <a:rPr lang="en-US"/>
+              <a:t>Tập trung scale sản phẩm </a:t>
+            </a:r>
+            <a:r>
+              <a:rPr lang="en-US"/>
+              <a:t>có </a:t>
+            </a:r>
+            <a:r>
+              <a:rPr lang="en-US" b="1" smtClean="0"/>
+              <a:t>tỷ lệ chuyển đổi </a:t>
+            </a:r>
+            <a:r>
+              <a:rPr lang="en-US" b="1"/>
+              <a:t>cao </a:t>
+            </a:r>
+            <a:r>
+              <a:rPr lang="en-US" b="1" smtClean="0"/>
+              <a:t>và tỷ lệ hoàn hàng thấp</a:t>
+            </a:r>
+            <a:endParaRPr lang="en-US" b="1"/>
+          </a:p>
+        </p:txBody>
+      </p:sp>
     </p:spTree>
+    <p:extLst>
+      <p:ext uri="{BB962C8B-B14F-4D97-AF65-F5344CB8AC3E}">
+        <p14:creationId xmlns:p14="http://schemas.microsoft.com/office/powerpoint/2010/main" val="3804097492"/>
+      </p:ext>
+    </p:extLst>
   </p:cSld>
   <p:clrMapOvr>
     <a:masterClrMapping/>
